--- a/images/CalcFlowChart.pptx
+++ b/images/CalcFlowChart.pptx
@@ -198,7 +198,7 @@
           <a:p>
             <a:fld id="{89C1FBCA-E71A-1B44-9589-7C34CA44EA86}" type="datetimeFigureOut">
               <a:rPr lang="en-US" smtClean="0"/>
-              <a:t>4/6/26</a:t>
+              <a:t>6/23/26</a:t>
             </a:fld>
             <a:endParaRPr lang="en-US"/>
           </a:p>
@@ -696,7 +696,7 @@
           <a:p>
             <a:fld id="{AA8C083C-7BCE-034A-BC88-A6671E86C8B9}" type="datetimeFigureOut">
               <a:rPr lang="en-US" smtClean="0"/>
-              <a:t>4/6/26</a:t>
+              <a:t>6/23/26</a:t>
             </a:fld>
             <a:endParaRPr lang="en-US"/>
           </a:p>
@@ -894,7 +894,7 @@
           <a:p>
             <a:fld id="{AA8C083C-7BCE-034A-BC88-A6671E86C8B9}" type="datetimeFigureOut">
               <a:rPr lang="en-US" smtClean="0"/>
-              <a:t>4/6/26</a:t>
+              <a:t>6/23/26</a:t>
             </a:fld>
             <a:endParaRPr lang="en-US"/>
           </a:p>
@@ -1102,7 +1102,7 @@
           <a:p>
             <a:fld id="{AA8C083C-7BCE-034A-BC88-A6671E86C8B9}" type="datetimeFigureOut">
               <a:rPr lang="en-US" smtClean="0"/>
-              <a:t>4/6/26</a:t>
+              <a:t>6/23/26</a:t>
             </a:fld>
             <a:endParaRPr lang="en-US"/>
           </a:p>
@@ -1300,7 +1300,7 @@
           <a:p>
             <a:fld id="{AA8C083C-7BCE-034A-BC88-A6671E86C8B9}" type="datetimeFigureOut">
               <a:rPr lang="en-US" smtClean="0"/>
-              <a:t>4/6/26</a:t>
+              <a:t>6/23/26</a:t>
             </a:fld>
             <a:endParaRPr lang="en-US"/>
           </a:p>
@@ -1575,7 +1575,7 @@
           <a:p>
             <a:fld id="{AA8C083C-7BCE-034A-BC88-A6671E86C8B9}" type="datetimeFigureOut">
               <a:rPr lang="en-US" smtClean="0"/>
-              <a:t>4/6/26</a:t>
+              <a:t>6/23/26</a:t>
             </a:fld>
             <a:endParaRPr lang="en-US"/>
           </a:p>
@@ -1840,7 +1840,7 @@
           <a:p>
             <a:fld id="{AA8C083C-7BCE-034A-BC88-A6671E86C8B9}" type="datetimeFigureOut">
               <a:rPr lang="en-US" smtClean="0"/>
-              <a:t>4/6/26</a:t>
+              <a:t>6/23/26</a:t>
             </a:fld>
             <a:endParaRPr lang="en-US"/>
           </a:p>
@@ -2252,7 +2252,7 @@
           <a:p>
             <a:fld id="{AA8C083C-7BCE-034A-BC88-A6671E86C8B9}" type="datetimeFigureOut">
               <a:rPr lang="en-US" smtClean="0"/>
-              <a:t>4/6/26</a:t>
+              <a:t>6/23/26</a:t>
             </a:fld>
             <a:endParaRPr lang="en-US"/>
           </a:p>
@@ -2393,7 +2393,7 @@
           <a:p>
             <a:fld id="{AA8C083C-7BCE-034A-BC88-A6671E86C8B9}" type="datetimeFigureOut">
               <a:rPr lang="en-US" smtClean="0"/>
-              <a:t>4/6/26</a:t>
+              <a:t>6/23/26</a:t>
             </a:fld>
             <a:endParaRPr lang="en-US"/>
           </a:p>
@@ -2506,7 +2506,7 @@
           <a:p>
             <a:fld id="{AA8C083C-7BCE-034A-BC88-A6671E86C8B9}" type="datetimeFigureOut">
               <a:rPr lang="en-US" smtClean="0"/>
-              <a:t>4/6/26</a:t>
+              <a:t>6/23/26</a:t>
             </a:fld>
             <a:endParaRPr lang="en-US"/>
           </a:p>
@@ -2817,7 +2817,7 @@
           <a:p>
             <a:fld id="{AA8C083C-7BCE-034A-BC88-A6671E86C8B9}" type="datetimeFigureOut">
               <a:rPr lang="en-US" smtClean="0"/>
-              <a:t>4/6/26</a:t>
+              <a:t>6/23/26</a:t>
             </a:fld>
             <a:endParaRPr lang="en-US"/>
           </a:p>
@@ -3105,7 +3105,7 @@
           <a:p>
             <a:fld id="{AA8C083C-7BCE-034A-BC88-A6671E86C8B9}" type="datetimeFigureOut">
               <a:rPr lang="en-US" smtClean="0"/>
-              <a:t>4/6/26</a:t>
+              <a:t>6/23/26</a:t>
             </a:fld>
             <a:endParaRPr lang="en-US"/>
           </a:p>
@@ -3346,7 +3346,7 @@
           <a:p>
             <a:fld id="{AA8C083C-7BCE-034A-BC88-A6671E86C8B9}" type="datetimeFigureOut">
               <a:rPr lang="en-US" smtClean="0"/>
-              <a:t>4/6/26</a:t>
+              <a:t>6/23/26</a:t>
             </a:fld>
             <a:endParaRPr lang="en-US"/>
           </a:p>
@@ -7604,9 +7604,9 @@
         <p:grpSpPr>
           <a:xfrm>
             <a:off x="2777405" y="763754"/>
-            <a:ext cx="909847" cy="601652"/>
+            <a:ext cx="909847" cy="609573"/>
             <a:chOff x="2924693" y="757617"/>
-            <a:chExt cx="909847" cy="601652"/>
+            <a:chExt cx="909847" cy="609573"/>
           </a:xfrm>
         </p:grpSpPr>
         <p:grpSp>
@@ -7624,9 +7624,9 @@
           <p:grpSpPr>
             <a:xfrm>
               <a:off x="2987118" y="757617"/>
-              <a:ext cx="786201" cy="601652"/>
+              <a:ext cx="786201" cy="609573"/>
               <a:chOff x="3287831" y="757617"/>
-              <a:chExt cx="786201" cy="601652"/>
+              <a:chExt cx="786201" cy="609573"/>
             </a:xfrm>
           </p:grpSpPr>
           <p:sp>
@@ -7683,7 +7683,7 @@
             </p:nvSpPr>
             <p:spPr>
               <a:xfrm>
-                <a:off x="3287831" y="1037900"/>
+                <a:off x="3287831" y="1042646"/>
                 <a:ext cx="780064" cy="230832"/>
               </a:xfrm>
               <a:prstGeom prst="rect">
@@ -7724,7 +7724,7 @@
             </p:nvSpPr>
             <p:spPr>
               <a:xfrm>
-                <a:off x="3293968" y="1128437"/>
+                <a:off x="3293968" y="1136358"/>
                 <a:ext cx="780064" cy="230832"/>
               </a:xfrm>
               <a:prstGeom prst="rect">
@@ -10596,6 +10596,303 @@
           <a:chExt cx="0" cy="0"/>
         </a:xfrm>
       </p:grpSpPr>
+      <p:sp>
+        <p:nvSpPr>
+          <p:cNvPr id="203" name="TextBox 202">
+            <a:extLst>
+              <a:ext uri="{FF2B5EF4-FFF2-40B4-BE49-F238E27FC236}">
+                <a16:creationId xmlns:a16="http://schemas.microsoft.com/office/drawing/2014/main" id="{87627FAF-1342-C0E5-E936-F13C2E78C70F}"/>
+              </a:ext>
+            </a:extLst>
+          </p:cNvPr>
+          <p:cNvSpPr txBox="1"/>
+          <p:nvPr/>
+        </p:nvSpPr>
+        <p:spPr>
+          <a:xfrm>
+            <a:off x="8256931" y="1081367"/>
+            <a:ext cx="932810" cy="230832"/>
+          </a:xfrm>
+          <a:prstGeom prst="rect">
+            <a:avLst/>
+          </a:prstGeom>
+          <a:noFill/>
+        </p:spPr>
+        <p:txBody>
+          <a:bodyPr wrap="square">
+            <a:spAutoFit/>
+          </a:bodyPr>
+          <a:lstStyle/>
+          <a:p>
+            <a:pPr algn="ctr"/>
+            <a:r>
+              <a:rPr lang="en-US" sz="900" dirty="0"/>
+              <a:t>w/ </a:t>
+            </a:r>
+            <a:r>
+              <a:rPr lang="en-US" sz="900" i="1" dirty="0"/>
+              <a:t>Q</a:t>
+            </a:r>
+          </a:p>
+        </p:txBody>
+      </p:sp>
+      <p:sp>
+        <p:nvSpPr>
+          <p:cNvPr id="193" name="TextBox 192">
+            <a:extLst>
+              <a:ext uri="{FF2B5EF4-FFF2-40B4-BE49-F238E27FC236}">
+                <a16:creationId xmlns:a16="http://schemas.microsoft.com/office/drawing/2014/main" id="{93F8363A-1002-41C4-02F0-FB2795880B43}"/>
+              </a:ext>
+            </a:extLst>
+          </p:cNvPr>
+          <p:cNvSpPr txBox="1"/>
+          <p:nvPr/>
+        </p:nvSpPr>
+        <p:spPr>
+          <a:xfrm>
+            <a:off x="8578497" y="991618"/>
+            <a:ext cx="256802" cy="230832"/>
+          </a:xfrm>
+          <a:prstGeom prst="rect">
+            <a:avLst/>
+          </a:prstGeom>
+          <a:noFill/>
+        </p:spPr>
+        <p:txBody>
+          <a:bodyPr wrap="none" rtlCol="0">
+            <a:spAutoFit/>
+          </a:bodyPr>
+          <a:lstStyle/>
+          <a:p>
+            <a:pPr algn="ctr"/>
+            <a:r>
+              <a:rPr lang="en-US" sz="900" b="1" dirty="0">
+                <a:solidFill>
+                  <a:srgbClr val="C00000"/>
+                </a:solidFill>
+              </a:rPr>
+              <a:t>B</a:t>
+            </a:r>
+            <a:endParaRPr lang="en-US" sz="900" b="1" baseline="-25000" dirty="0">
+              <a:solidFill>
+                <a:srgbClr val="C00000"/>
+              </a:solidFill>
+            </a:endParaRPr>
+          </a:p>
+        </p:txBody>
+      </p:sp>
+      <p:sp>
+        <p:nvSpPr>
+          <p:cNvPr id="167" name="TextBox 166">
+            <a:extLst>
+              <a:ext uri="{FF2B5EF4-FFF2-40B4-BE49-F238E27FC236}">
+                <a16:creationId xmlns:a16="http://schemas.microsoft.com/office/drawing/2014/main" id="{9B6F98D7-89C1-2120-3824-094CC1240159}"/>
+              </a:ext>
+            </a:extLst>
+          </p:cNvPr>
+          <p:cNvSpPr txBox="1"/>
+          <p:nvPr/>
+        </p:nvSpPr>
+        <p:spPr>
+          <a:xfrm>
+            <a:off x="6784102" y="1600200"/>
+            <a:ext cx="434734" cy="230832"/>
+          </a:xfrm>
+          <a:prstGeom prst="rect">
+            <a:avLst/>
+          </a:prstGeom>
+          <a:noFill/>
+        </p:spPr>
+        <p:txBody>
+          <a:bodyPr wrap="none" rtlCol="0">
+            <a:spAutoFit/>
+          </a:bodyPr>
+          <a:lstStyle/>
+          <a:p>
+            <a:pPr algn="ctr"/>
+            <a:r>
+              <a:rPr lang="en-US" sz="900" b="1" dirty="0" err="1">
+                <a:solidFill>
+                  <a:srgbClr val="C00000"/>
+                </a:solidFill>
+              </a:rPr>
+              <a:t>B</a:t>
+            </a:r>
+            <a:r>
+              <a:rPr lang="en-US" sz="900" b="1" baseline="-25000" dirty="0" err="1">
+                <a:solidFill>
+                  <a:srgbClr val="C00000"/>
+                </a:solidFill>
+              </a:rPr>
+              <a:t>elect</a:t>
+            </a:r>
+            <a:endParaRPr lang="en-US" sz="900" b="1" baseline="-25000" dirty="0">
+              <a:solidFill>
+                <a:srgbClr val="C00000"/>
+              </a:solidFill>
+            </a:endParaRPr>
+          </a:p>
+        </p:txBody>
+      </p:sp>
+      <p:sp>
+        <p:nvSpPr>
+          <p:cNvPr id="166" name="TextBox 165">
+            <a:extLst>
+              <a:ext uri="{FF2B5EF4-FFF2-40B4-BE49-F238E27FC236}">
+                <a16:creationId xmlns:a16="http://schemas.microsoft.com/office/drawing/2014/main" id="{9027FDA1-B51A-B735-7D2C-9BCAFE9B7A90}"/>
+              </a:ext>
+            </a:extLst>
+          </p:cNvPr>
+          <p:cNvSpPr txBox="1"/>
+          <p:nvPr/>
+        </p:nvSpPr>
+        <p:spPr>
+          <a:xfrm>
+            <a:off x="6720477" y="990600"/>
+            <a:ext cx="460383" cy="230832"/>
+          </a:xfrm>
+          <a:prstGeom prst="rect">
+            <a:avLst/>
+          </a:prstGeom>
+          <a:noFill/>
+        </p:spPr>
+        <p:txBody>
+          <a:bodyPr wrap="none" rtlCol="0">
+            <a:spAutoFit/>
+          </a:bodyPr>
+          <a:lstStyle/>
+          <a:p>
+            <a:pPr algn="ctr"/>
+            <a:r>
+              <a:rPr lang="en-US" sz="900" b="1" dirty="0" err="1">
+                <a:solidFill>
+                  <a:srgbClr val="C00000"/>
+                </a:solidFill>
+              </a:rPr>
+              <a:t>B</a:t>
+            </a:r>
+            <a:r>
+              <a:rPr lang="en-US" sz="900" b="1" baseline="-25000" dirty="0" err="1">
+                <a:solidFill>
+                  <a:srgbClr val="C00000"/>
+                </a:solidFill>
+              </a:rPr>
+              <a:t>Qloss</a:t>
+            </a:r>
+            <a:endParaRPr lang="en-US" sz="900" b="1" baseline="-25000" dirty="0">
+              <a:solidFill>
+                <a:srgbClr val="C00000"/>
+              </a:solidFill>
+            </a:endParaRPr>
+          </a:p>
+        </p:txBody>
+      </p:sp>
+      <p:sp>
+        <p:nvSpPr>
+          <p:cNvPr id="162" name="TextBox 161">
+            <a:extLst>
+              <a:ext uri="{FF2B5EF4-FFF2-40B4-BE49-F238E27FC236}">
+                <a16:creationId xmlns:a16="http://schemas.microsoft.com/office/drawing/2014/main" id="{87FE7C56-BD8F-4AD4-408C-5968818CFE08}"/>
+              </a:ext>
+            </a:extLst>
+          </p:cNvPr>
+          <p:cNvSpPr txBox="1"/>
+          <p:nvPr/>
+        </p:nvSpPr>
+        <p:spPr>
+          <a:xfrm>
+            <a:off x="6746846" y="278601"/>
+            <a:ext cx="447559" cy="230832"/>
+          </a:xfrm>
+          <a:prstGeom prst="rect">
+            <a:avLst/>
+          </a:prstGeom>
+          <a:noFill/>
+        </p:spPr>
+        <p:txBody>
+          <a:bodyPr wrap="none" rtlCol="0">
+            <a:spAutoFit/>
+          </a:bodyPr>
+          <a:lstStyle/>
+          <a:p>
+            <a:pPr algn="ctr"/>
+            <a:r>
+              <a:rPr lang="en-US" sz="900" b="1" dirty="0" err="1">
+                <a:solidFill>
+                  <a:srgbClr val="C00000"/>
+                </a:solidFill>
+              </a:rPr>
+              <a:t>B</a:t>
+            </a:r>
+            <a:r>
+              <a:rPr lang="en-US" sz="900" b="1" baseline="-25000" dirty="0" err="1">
+                <a:solidFill>
+                  <a:srgbClr val="C00000"/>
+                </a:solidFill>
+              </a:rPr>
+              <a:t>mass</a:t>
+            </a:r>
+            <a:endParaRPr lang="en-US" sz="900" b="1" baseline="-25000" dirty="0">
+              <a:solidFill>
+                <a:srgbClr val="C00000"/>
+              </a:solidFill>
+            </a:endParaRPr>
+          </a:p>
+        </p:txBody>
+      </p:sp>
+      <p:sp>
+        <p:nvSpPr>
+          <p:cNvPr id="123" name="TextBox 122">
+            <a:extLst>
+              <a:ext uri="{FF2B5EF4-FFF2-40B4-BE49-F238E27FC236}">
+                <a16:creationId xmlns:a16="http://schemas.microsoft.com/office/drawing/2014/main" id="{D25B1856-AF8F-B16E-2A1B-3E878AB0AC9D}"/>
+              </a:ext>
+            </a:extLst>
+          </p:cNvPr>
+          <p:cNvSpPr txBox="1"/>
+          <p:nvPr/>
+        </p:nvSpPr>
+        <p:spPr>
+          <a:xfrm>
+            <a:off x="5688017" y="856451"/>
+            <a:ext cx="417101" cy="230832"/>
+          </a:xfrm>
+          <a:prstGeom prst="rect">
+            <a:avLst/>
+          </a:prstGeom>
+          <a:noFill/>
+        </p:spPr>
+        <p:txBody>
+          <a:bodyPr wrap="none" rtlCol="0">
+            <a:spAutoFit/>
+          </a:bodyPr>
+          <a:lstStyle/>
+          <a:p>
+            <a:pPr algn="ctr"/>
+            <a:r>
+              <a:rPr lang="en-US" sz="900" b="1" dirty="0" err="1">
+                <a:solidFill>
+                  <a:srgbClr val="C00000"/>
+                </a:solidFill>
+              </a:rPr>
+              <a:t>Q</a:t>
+            </a:r>
+            <a:r>
+              <a:rPr lang="en-US" sz="900" b="1" baseline="-25000" dirty="0" err="1">
+                <a:solidFill>
+                  <a:srgbClr val="C00000"/>
+                </a:solidFill>
+              </a:rPr>
+              <a:t>loss</a:t>
+            </a:r>
+            <a:endParaRPr lang="en-US" sz="900" b="1" baseline="-25000" dirty="0">
+              <a:solidFill>
+                <a:srgbClr val="C00000"/>
+              </a:solidFill>
+            </a:endParaRPr>
+          </a:p>
+        </p:txBody>
+      </p:sp>
       <p:cxnSp>
         <p:nvCxnSpPr>
           <p:cNvPr id="33" name="Straight Arrow Connector 32">
@@ -10608,14 +10905,13 @@
           <p:cNvCxnSpPr>
             <a:cxnSpLocks/>
             <a:stCxn id="32" idx="3"/>
-            <a:endCxn id="39" idx="1"/>
           </p:cNvCxnSpPr>
           <p:nvPr/>
         </p:nvCxnSpPr>
         <p:spPr>
           <a:xfrm>
             <a:off x="2966539" y="812001"/>
-            <a:ext cx="593425" cy="0"/>
+            <a:ext cx="697411" cy="0"/>
           </a:xfrm>
           <a:prstGeom prst="straightConnector1">
             <a:avLst/>
@@ -10659,7 +10955,7 @@
         </p:nvCxnSpPr>
         <p:spPr>
           <a:xfrm>
-            <a:off x="1515407" y="1210589"/>
+            <a:off x="1515407" y="401120"/>
             <a:ext cx="631445" cy="0"/>
           </a:xfrm>
           <a:prstGeom prst="straightConnector1">
@@ -10703,7 +10999,7 @@
         </p:nvCxnSpPr>
         <p:spPr>
           <a:xfrm>
-            <a:off x="1491270" y="743401"/>
+            <a:off x="1502617" y="1153132"/>
             <a:ext cx="632469" cy="0"/>
           </a:xfrm>
           <a:prstGeom prst="straightConnector1">
@@ -10747,7 +11043,7 @@
         </p:nvCxnSpPr>
         <p:spPr>
           <a:xfrm>
-            <a:off x="165695" y="1221849"/>
+            <a:off x="165695" y="412380"/>
             <a:ext cx="469804" cy="0"/>
           </a:xfrm>
           <a:prstGeom prst="straightConnector1">
@@ -10791,7 +11087,7 @@
         </p:nvCxnSpPr>
         <p:spPr>
           <a:xfrm>
-            <a:off x="1497407" y="362706"/>
+            <a:off x="1510576" y="762444"/>
             <a:ext cx="626154" cy="0"/>
           </a:xfrm>
           <a:prstGeom prst="straightConnector1">
@@ -10833,7 +11129,7 @@
         </p:nvGrpSpPr>
         <p:grpSpPr>
           <a:xfrm>
-            <a:off x="1366941" y="308449"/>
+            <a:off x="1331964" y="718180"/>
             <a:ext cx="928257" cy="327211"/>
             <a:chOff x="1788992" y="363682"/>
             <a:chExt cx="928257" cy="327211"/>
@@ -10938,7 +11234,7 @@
         </p:nvGrpSpPr>
         <p:grpSpPr>
           <a:xfrm>
-            <a:off x="1366941" y="689144"/>
+            <a:off x="1331964" y="1098875"/>
             <a:ext cx="909847" cy="319119"/>
             <a:chOff x="1788992" y="744377"/>
             <a:chExt cx="909847" cy="319119"/>
@@ -11043,7 +11339,7 @@
         </p:nvGrpSpPr>
         <p:grpSpPr>
           <a:xfrm>
-            <a:off x="1362292" y="1157780"/>
+            <a:off x="1362292" y="348311"/>
             <a:ext cx="879721" cy="416146"/>
             <a:chOff x="1845884" y="1157780"/>
             <a:chExt cx="879721" cy="416146"/>
@@ -11180,7 +11476,7 @@
         </p:nvGrpSpPr>
         <p:grpSpPr>
           <a:xfrm>
-            <a:off x="-142357" y="1166121"/>
+            <a:off x="-142357" y="356652"/>
             <a:ext cx="1023405" cy="416904"/>
             <a:chOff x="158356" y="1166121"/>
             <a:chExt cx="1023405" cy="416904"/>
@@ -11303,198 +11599,6 @@
           </p:txBody>
         </p:sp>
       </p:grpSp>
-      <p:cxnSp>
-        <p:nvCxnSpPr>
-          <p:cNvPr id="45" name="Straight Arrow Connector 44">
-            <a:extLst>
-              <a:ext uri="{FF2B5EF4-FFF2-40B4-BE49-F238E27FC236}">
-                <a16:creationId xmlns:a16="http://schemas.microsoft.com/office/drawing/2014/main" id="{D2CDC110-800B-C5AC-8900-B6F6AA8BBAEB}"/>
-              </a:ext>
-            </a:extLst>
-          </p:cNvPr>
-          <p:cNvCxnSpPr>
-            <a:cxnSpLocks/>
-            <a:stCxn id="39" idx="3"/>
-            <a:endCxn id="126" idx="1"/>
-          </p:cNvCxnSpPr>
-          <p:nvPr/>
-        </p:nvCxnSpPr>
-        <p:spPr>
-          <a:xfrm flipV="1">
-            <a:off x="4507415" y="807439"/>
-            <a:ext cx="467001" cy="4562"/>
-          </a:xfrm>
-          <a:prstGeom prst="straightConnector1">
-            <a:avLst/>
-          </a:prstGeom>
-          <a:ln>
-            <a:solidFill>
-              <a:srgbClr val="C00000"/>
-            </a:solidFill>
-            <a:tailEnd type="triangle"/>
-          </a:ln>
-        </p:spPr>
-        <p:style>
-          <a:lnRef idx="2">
-            <a:schemeClr val="accent1"/>
-          </a:lnRef>
-          <a:fillRef idx="0">
-            <a:schemeClr val="accent1"/>
-          </a:fillRef>
-          <a:effectRef idx="1">
-            <a:schemeClr val="accent1"/>
-          </a:effectRef>
-          <a:fontRef idx="minor">
-            <a:schemeClr val="tx1"/>
-          </a:fontRef>
-        </p:style>
-      </p:cxnSp>
-      <p:grpSp>
-        <p:nvGrpSpPr>
-          <p:cNvPr id="53" name="Group 52">
-            <a:extLst>
-              <a:ext uri="{FF2B5EF4-FFF2-40B4-BE49-F238E27FC236}">
-                <a16:creationId xmlns:a16="http://schemas.microsoft.com/office/drawing/2014/main" id="{7583CE86-A8F3-678B-51DB-C420F63E433F}"/>
-              </a:ext>
-            </a:extLst>
-          </p:cNvPr>
-          <p:cNvGrpSpPr/>
-          <p:nvPr/>
-        </p:nvGrpSpPr>
-        <p:grpSpPr>
-          <a:xfrm>
-            <a:off x="4242473" y="762213"/>
-            <a:ext cx="961619" cy="417542"/>
-            <a:chOff x="3201912" y="757617"/>
-            <a:chExt cx="961619" cy="417542"/>
-          </a:xfrm>
-        </p:grpSpPr>
-        <p:sp>
-          <p:nvSpPr>
-            <p:cNvPr id="54" name="TextBox 53">
-              <a:extLst>
-                <a:ext uri="{FF2B5EF4-FFF2-40B4-BE49-F238E27FC236}">
-                  <a16:creationId xmlns:a16="http://schemas.microsoft.com/office/drawing/2014/main" id="{608D3949-CECE-6163-02CD-2A96576074AD}"/>
-                </a:ext>
-              </a:extLst>
-            </p:cNvPr>
-            <p:cNvSpPr txBox="1"/>
-            <p:nvPr/>
-          </p:nvSpPr>
-          <p:spPr>
-            <a:xfrm>
-              <a:off x="3559213" y="757617"/>
-              <a:ext cx="250389" cy="230832"/>
-            </a:xfrm>
-            <a:prstGeom prst="rect">
-              <a:avLst/>
-            </a:prstGeom>
-            <a:noFill/>
-          </p:spPr>
-          <p:txBody>
-            <a:bodyPr wrap="none" rtlCol="0">
-              <a:spAutoFit/>
-            </a:bodyPr>
-            <a:lstStyle/>
-            <a:p>
-              <a:pPr algn="ctr"/>
-              <a:r>
-                <a:rPr lang="en-US" sz="900" b="1" dirty="0">
-                  <a:solidFill>
-                    <a:srgbClr val="C00000"/>
-                  </a:solidFill>
-                </a:rPr>
-                <a:t>E</a:t>
-              </a:r>
-            </a:p>
-          </p:txBody>
-        </p:sp>
-        <p:sp>
-          <p:nvSpPr>
-            <p:cNvPr id="55" name="TextBox 54">
-              <a:extLst>
-                <a:ext uri="{FF2B5EF4-FFF2-40B4-BE49-F238E27FC236}">
-                  <a16:creationId xmlns:a16="http://schemas.microsoft.com/office/drawing/2014/main" id="{B0C83C68-A4D1-D658-120F-BDF14D220D22}"/>
-                </a:ext>
-              </a:extLst>
-            </p:cNvPr>
-            <p:cNvSpPr txBox="1"/>
-            <p:nvPr/>
-          </p:nvSpPr>
-          <p:spPr>
-            <a:xfrm>
-              <a:off x="3306242" y="847656"/>
-              <a:ext cx="780064" cy="230832"/>
-            </a:xfrm>
-            <a:prstGeom prst="rect">
-              <a:avLst/>
-            </a:prstGeom>
-            <a:noFill/>
-          </p:spPr>
-          <p:txBody>
-            <a:bodyPr wrap="square">
-              <a:spAutoFit/>
-            </a:bodyPr>
-            <a:lstStyle/>
-            <a:p>
-              <a:pPr algn="ctr"/>
-              <a:r>
-                <a:rPr lang="en-US" sz="900" dirty="0"/>
-                <a:t>w/ </a:t>
-              </a:r>
-              <a:r>
-                <a:rPr lang="en-US" sz="900" i="1" dirty="0" err="1"/>
-                <a:t>m</a:t>
-              </a:r>
-              <a:r>
-                <a:rPr lang="en-US" sz="900" dirty="0" err="1"/>
-                <a:t>&amp;</a:t>
-              </a:r>
-              <a:r>
-                <a:rPr lang="en-US" sz="900" i="1" dirty="0" err="1"/>
-                <a:t>Q</a:t>
-              </a:r>
-              <a:endParaRPr lang="en-US" sz="900" i="1" dirty="0"/>
-            </a:p>
-          </p:txBody>
-        </p:sp>
-        <p:sp>
-          <p:nvSpPr>
-            <p:cNvPr id="56" name="TextBox 55">
-              <a:extLst>
-                <a:ext uri="{FF2B5EF4-FFF2-40B4-BE49-F238E27FC236}">
-                  <a16:creationId xmlns:a16="http://schemas.microsoft.com/office/drawing/2014/main" id="{23F6AD52-CDE0-C5DC-65D3-90334410FE87}"/>
-                </a:ext>
-              </a:extLst>
-            </p:cNvPr>
-            <p:cNvSpPr txBox="1"/>
-            <p:nvPr/>
-          </p:nvSpPr>
-          <p:spPr>
-            <a:xfrm>
-              <a:off x="3201912" y="944327"/>
-              <a:ext cx="961619" cy="230832"/>
-            </a:xfrm>
-            <a:prstGeom prst="rect">
-              <a:avLst/>
-            </a:prstGeom>
-            <a:noFill/>
-          </p:spPr>
-          <p:txBody>
-            <a:bodyPr wrap="square">
-              <a:spAutoFit/>
-            </a:bodyPr>
-            <a:lstStyle/>
-            <a:p>
-              <a:pPr algn="ctr"/>
-              <a:r>
-                <a:rPr lang="en-US" sz="900" dirty="0"/>
-                <a:t>losses</a:t>
-              </a:r>
-            </a:p>
-          </p:txBody>
-        </p:sp>
-      </p:grpSp>
       <p:grpSp>
         <p:nvGrpSpPr>
           <p:cNvPr id="191" name="Group 190">
@@ -11509,9 +11613,9 @@
         </p:nvGrpSpPr>
         <p:grpSpPr>
           <a:xfrm>
-            <a:off x="4362450" y="1253914"/>
+            <a:off x="5447243" y="353512"/>
             <a:ext cx="603152" cy="230832"/>
-            <a:chOff x="3864936" y="1695239"/>
+            <a:chOff x="3864936" y="1593639"/>
             <a:chExt cx="603152" cy="230832"/>
           </a:xfrm>
         </p:grpSpPr>
@@ -11531,7 +11635,7 @@
           </p:nvCxnSpPr>
           <p:spPr>
             <a:xfrm>
-              <a:off x="3864936" y="1749496"/>
+              <a:off x="3864936" y="1651071"/>
               <a:ext cx="603152" cy="0"/>
             </a:xfrm>
             <a:prstGeom prst="straightConnector1">
@@ -11573,7 +11677,7 @@
           </p:nvSpPr>
           <p:spPr>
             <a:xfrm>
-              <a:off x="4007230" y="1695239"/>
+              <a:off x="4007230" y="1593639"/>
               <a:ext cx="311304" cy="230832"/>
             </a:xfrm>
             <a:prstGeom prst="rect">
@@ -11618,10 +11722,10 @@
       </p:grpSp>
       <p:grpSp>
         <p:nvGrpSpPr>
-          <p:cNvPr id="141" name="Group 140">
-            <a:extLst>
-              <a:ext uri="{FF2B5EF4-FFF2-40B4-BE49-F238E27FC236}">
-                <a16:creationId xmlns:a16="http://schemas.microsoft.com/office/drawing/2014/main" id="{C4998E2B-E3CF-46F1-577F-EF8124CBEEE3}"/>
+          <p:cNvPr id="135" name="Group 134">
+            <a:extLst>
+              <a:ext uri="{FF2B5EF4-FFF2-40B4-BE49-F238E27FC236}">
+                <a16:creationId xmlns:a16="http://schemas.microsoft.com/office/drawing/2014/main" id="{6B85A7CC-EBEF-87FD-D818-57836AFCE8A3}"/>
               </a:ext>
             </a:extLst>
           </p:cNvPr>
@@ -11630,221 +11734,9 @@
         </p:nvGrpSpPr>
         <p:grpSpPr>
           <a:xfrm>
-            <a:off x="5585995" y="756399"/>
-            <a:ext cx="756123" cy="421656"/>
-            <a:chOff x="5585995" y="756399"/>
-            <a:chExt cx="756123" cy="421656"/>
-          </a:xfrm>
-        </p:grpSpPr>
-        <p:cxnSp>
-          <p:nvCxnSpPr>
-            <p:cNvPr id="89" name="Straight Arrow Connector 88">
-              <a:extLst>
-                <a:ext uri="{FF2B5EF4-FFF2-40B4-BE49-F238E27FC236}">
-                  <a16:creationId xmlns:a16="http://schemas.microsoft.com/office/drawing/2014/main" id="{AFDFBD23-688F-4183-F908-728D645FDC04}"/>
-                </a:ext>
-              </a:extLst>
-            </p:cNvPr>
-            <p:cNvCxnSpPr>
-              <a:cxnSpLocks/>
-              <a:stCxn id="126" idx="3"/>
-            </p:cNvCxnSpPr>
-            <p:nvPr/>
-          </p:nvCxnSpPr>
-          <p:spPr>
-            <a:xfrm>
-              <a:off x="5686593" y="807439"/>
-              <a:ext cx="653882" cy="0"/>
-            </a:xfrm>
-            <a:prstGeom prst="straightConnector1">
-              <a:avLst/>
-            </a:prstGeom>
-            <a:ln>
-              <a:solidFill>
-                <a:srgbClr val="C00000"/>
-              </a:solidFill>
-              <a:tailEnd type="triangle"/>
-            </a:ln>
-          </p:spPr>
-          <p:style>
-            <a:lnRef idx="2">
-              <a:schemeClr val="accent1"/>
-            </a:lnRef>
-            <a:fillRef idx="0">
-              <a:schemeClr val="accent1"/>
-            </a:fillRef>
-            <a:effectRef idx="1">
-              <a:schemeClr val="accent1"/>
-            </a:effectRef>
-            <a:fontRef idx="minor">
-              <a:schemeClr val="tx1"/>
-            </a:fontRef>
-          </p:style>
-        </p:cxnSp>
-        <p:sp>
-          <p:nvSpPr>
-            <p:cNvPr id="92" name="TextBox 91">
-              <a:extLst>
-                <a:ext uri="{FF2B5EF4-FFF2-40B4-BE49-F238E27FC236}">
-                  <a16:creationId xmlns:a16="http://schemas.microsoft.com/office/drawing/2014/main" id="{B7F82BCD-CE27-7667-DBA4-0A7C0C4D748A}"/>
-                </a:ext>
-              </a:extLst>
-            </p:cNvPr>
-            <p:cNvSpPr txBox="1"/>
-            <p:nvPr/>
-          </p:nvSpPr>
-          <p:spPr>
-            <a:xfrm>
-              <a:off x="5844379" y="756399"/>
-              <a:ext cx="256802" cy="230832"/>
-            </a:xfrm>
-            <a:prstGeom prst="rect">
-              <a:avLst/>
-            </a:prstGeom>
-            <a:noFill/>
-          </p:spPr>
-          <p:txBody>
-            <a:bodyPr wrap="none" rtlCol="0">
-              <a:spAutoFit/>
-            </a:bodyPr>
-            <a:lstStyle/>
-            <a:p>
-              <a:pPr algn="ctr"/>
-              <a:r>
-                <a:rPr lang="en-US" sz="900" b="1" dirty="0">
-                  <a:solidFill>
-                    <a:srgbClr val="C00000"/>
-                  </a:solidFill>
-                </a:rPr>
-                <a:t>B</a:t>
-              </a:r>
-            </a:p>
-          </p:txBody>
-        </p:sp>
-        <p:grpSp>
-          <p:nvGrpSpPr>
-            <p:cNvPr id="140" name="Group 139">
-              <a:extLst>
-                <a:ext uri="{FF2B5EF4-FFF2-40B4-BE49-F238E27FC236}">
-                  <a16:creationId xmlns:a16="http://schemas.microsoft.com/office/drawing/2014/main" id="{7BED5F3B-44FB-9E29-4C29-C8247CE3355B}"/>
-                </a:ext>
-              </a:extLst>
-            </p:cNvPr>
-            <p:cNvGrpSpPr/>
-            <p:nvPr/>
-          </p:nvGrpSpPr>
-          <p:grpSpPr>
-            <a:xfrm>
-              <a:off x="5585995" y="846438"/>
-              <a:ext cx="756123" cy="331617"/>
-              <a:chOff x="5585995" y="846438"/>
-              <a:chExt cx="756123" cy="331617"/>
-            </a:xfrm>
-          </p:grpSpPr>
-          <p:sp>
-            <p:nvSpPr>
-              <p:cNvPr id="93" name="TextBox 92">
-                <a:extLst>
-                  <a:ext uri="{FF2B5EF4-FFF2-40B4-BE49-F238E27FC236}">
-                    <a16:creationId xmlns:a16="http://schemas.microsoft.com/office/drawing/2014/main" id="{6F976FB9-AEFD-AEEC-F3D5-690EF87C5A88}"/>
-                  </a:ext>
-                </a:extLst>
-              </p:cNvPr>
-              <p:cNvSpPr txBox="1"/>
-              <p:nvPr/>
-            </p:nvSpPr>
-            <p:spPr>
-              <a:xfrm>
-                <a:off x="5585995" y="846438"/>
-                <a:ext cx="756123" cy="230832"/>
-              </a:xfrm>
-              <a:prstGeom prst="rect">
-                <a:avLst/>
-              </a:prstGeom>
-              <a:noFill/>
-            </p:spPr>
-            <p:txBody>
-              <a:bodyPr wrap="square">
-                <a:spAutoFit/>
-              </a:bodyPr>
-              <a:lstStyle/>
-              <a:p>
-                <a:pPr algn="ctr"/>
-                <a:r>
-                  <a:rPr lang="en-US" sz="900" dirty="0"/>
-                  <a:t>w/ </a:t>
-                </a:r>
-                <a:r>
-                  <a:rPr lang="en-US" sz="900" i="1" dirty="0" err="1"/>
-                  <a:t>m</a:t>
-                </a:r>
-                <a:r>
-                  <a:rPr lang="en-US" sz="900" dirty="0" err="1"/>
-                  <a:t>&amp;</a:t>
-                </a:r>
-                <a:r>
-                  <a:rPr lang="en-US" sz="900" i="1" dirty="0" err="1"/>
-                  <a:t>Q</a:t>
-                </a:r>
-                <a:endParaRPr lang="en-US" sz="900" i="1" dirty="0"/>
-              </a:p>
-            </p:txBody>
-          </p:sp>
-          <p:sp>
-            <p:nvSpPr>
-              <p:cNvPr id="97" name="TextBox 96">
-                <a:extLst>
-                  <a:ext uri="{FF2B5EF4-FFF2-40B4-BE49-F238E27FC236}">
-                    <a16:creationId xmlns:a16="http://schemas.microsoft.com/office/drawing/2014/main" id="{EB6AEC07-D4F4-C057-38E4-49F9B66CD005}"/>
-                  </a:ext>
-                </a:extLst>
-              </p:cNvPr>
-              <p:cNvSpPr txBox="1"/>
-              <p:nvPr/>
-            </p:nvSpPr>
-            <p:spPr>
-              <a:xfrm>
-                <a:off x="5617849" y="947223"/>
-                <a:ext cx="670238" cy="230832"/>
-              </a:xfrm>
-              <a:prstGeom prst="rect">
-                <a:avLst/>
-              </a:prstGeom>
-              <a:noFill/>
-            </p:spPr>
-            <p:txBody>
-              <a:bodyPr wrap="square">
-                <a:spAutoFit/>
-              </a:bodyPr>
-              <a:lstStyle/>
-              <a:p>
-                <a:pPr algn="ctr"/>
-                <a:r>
-                  <a:rPr lang="en-US" sz="900" dirty="0"/>
-                  <a:t>losses</a:t>
-                </a:r>
-              </a:p>
-            </p:txBody>
-          </p:sp>
-        </p:grpSp>
-      </p:grpSp>
-      <p:grpSp>
-        <p:nvGrpSpPr>
-          <p:cNvPr id="135" name="Group 134">
-            <a:extLst>
-              <a:ext uri="{FF2B5EF4-FFF2-40B4-BE49-F238E27FC236}">
-                <a16:creationId xmlns:a16="http://schemas.microsoft.com/office/drawing/2014/main" id="{6B85A7CC-EBEF-87FD-D818-57836AFCE8A3}"/>
-              </a:ext>
-            </a:extLst>
-          </p:cNvPr>
-          <p:cNvGrpSpPr/>
-          <p:nvPr/>
-        </p:nvGrpSpPr>
-        <p:grpSpPr>
-          <a:xfrm>
-            <a:off x="4235816" y="242213"/>
+            <a:off x="5339659" y="1173786"/>
             <a:ext cx="780064" cy="311549"/>
-            <a:chOff x="4067541" y="242213"/>
+            <a:chOff x="451216" y="1299488"/>
             <a:chExt cx="780064" cy="311549"/>
           </a:xfrm>
         </p:grpSpPr>
@@ -11862,52 +11754,12 @@
           </p:nvGrpSpPr>
           <p:grpSpPr>
             <a:xfrm>
-              <a:off x="4067541" y="242213"/>
+              <a:off x="451216" y="1299488"/>
               <a:ext cx="780064" cy="311549"/>
-              <a:chOff x="1842522" y="363682"/>
+              <a:chOff x="-1773803" y="1420957"/>
               <a:chExt cx="780064" cy="311549"/>
             </a:xfrm>
           </p:grpSpPr>
-          <p:sp>
-            <p:nvSpPr>
-              <p:cNvPr id="100" name="TextBox 99">
-                <a:extLst>
-                  <a:ext uri="{FF2B5EF4-FFF2-40B4-BE49-F238E27FC236}">
-                    <a16:creationId xmlns:a16="http://schemas.microsoft.com/office/drawing/2014/main" id="{43A25E2A-A9A1-11FC-7F1A-F23AB7EBC5BF}"/>
-                  </a:ext>
-                </a:extLst>
-              </p:cNvPr>
-              <p:cNvSpPr txBox="1"/>
-              <p:nvPr/>
-            </p:nvSpPr>
-            <p:spPr>
-              <a:xfrm>
-                <a:off x="2126149" y="363682"/>
-                <a:ext cx="226344" cy="230832"/>
-              </a:xfrm>
-              <a:prstGeom prst="rect">
-                <a:avLst/>
-              </a:prstGeom>
-              <a:noFill/>
-            </p:spPr>
-            <p:txBody>
-              <a:bodyPr wrap="none" rtlCol="0">
-                <a:spAutoFit/>
-              </a:bodyPr>
-              <a:lstStyle/>
-              <a:p>
-                <a:pPr algn="ctr"/>
-                <a:r>
-                  <a:rPr lang="en-US" sz="900" b="1" dirty="0">
-                    <a:solidFill>
-                      <a:schemeClr val="accent5"/>
-                    </a:solidFill>
-                  </a:rPr>
-                  <a:t>t</a:t>
-                </a:r>
-              </a:p>
-            </p:txBody>
-          </p:sp>
           <p:sp>
             <p:nvSpPr>
               <p:cNvPr id="101" name="TextBox 100">
@@ -11922,7 +11774,7 @@
             </p:nvSpPr>
             <p:spPr>
               <a:xfrm>
-                <a:off x="1842522" y="444399"/>
+                <a:off x="-1773803" y="1501674"/>
                 <a:ext cx="780064" cy="230832"/>
               </a:xfrm>
               <a:prstGeom prst="rect">
@@ -11952,6 +11804,46 @@
               </a:p>
             </p:txBody>
           </p:sp>
+          <p:sp>
+            <p:nvSpPr>
+              <p:cNvPr id="100" name="TextBox 99">
+                <a:extLst>
+                  <a:ext uri="{FF2B5EF4-FFF2-40B4-BE49-F238E27FC236}">
+                    <a16:creationId xmlns:a16="http://schemas.microsoft.com/office/drawing/2014/main" id="{43A25E2A-A9A1-11FC-7F1A-F23AB7EBC5BF}"/>
+                  </a:ext>
+                </a:extLst>
+              </p:cNvPr>
+              <p:cNvSpPr txBox="1"/>
+              <p:nvPr/>
+            </p:nvSpPr>
+            <p:spPr>
+              <a:xfrm>
+                <a:off x="-1515576" y="1420957"/>
+                <a:ext cx="226344" cy="230832"/>
+              </a:xfrm>
+              <a:prstGeom prst="rect">
+                <a:avLst/>
+              </a:prstGeom>
+              <a:noFill/>
+            </p:spPr>
+            <p:txBody>
+              <a:bodyPr wrap="none" rtlCol="0">
+                <a:spAutoFit/>
+              </a:bodyPr>
+              <a:lstStyle/>
+              <a:p>
+                <a:pPr algn="ctr"/>
+                <a:r>
+                  <a:rPr lang="en-US" sz="900" b="1" dirty="0">
+                    <a:solidFill>
+                      <a:schemeClr val="accent5"/>
+                    </a:solidFill>
+                  </a:rPr>
+                  <a:t>t</a:t>
+                </a:r>
+              </a:p>
+            </p:txBody>
+          </p:sp>
         </p:grpSp>
         <p:cxnSp>
           <p:nvCxnSpPr>
@@ -11969,7 +11861,7 @@
           </p:nvCxnSpPr>
           <p:spPr>
             <a:xfrm>
-              <a:off x="4187825" y="289615"/>
+              <a:off x="555625" y="1356415"/>
               <a:ext cx="605307" cy="0"/>
             </a:xfrm>
             <a:prstGeom prst="straightConnector1">
@@ -12012,8 +11904,8 @@
         </p:nvSpPr>
         <p:spPr>
           <a:xfrm>
-            <a:off x="-38100" y="1688631"/>
-            <a:ext cx="1095842" cy="230832"/>
+            <a:off x="-38100" y="2937809"/>
+            <a:ext cx="427844" cy="230832"/>
           </a:xfrm>
           <a:prstGeom prst="rect">
             <a:avLst/>
@@ -12047,7 +11939,7 @@
         </p:nvSpPr>
         <p:spPr>
           <a:xfrm>
-            <a:off x="128180" y="1965834"/>
+            <a:off x="128180" y="3215012"/>
             <a:ext cx="1898277" cy="230832"/>
           </a:xfrm>
           <a:prstGeom prst="rect">
@@ -12091,7 +11983,7 @@
         </p:nvSpPr>
         <p:spPr>
           <a:xfrm>
-            <a:off x="140246" y="2749564"/>
+            <a:off x="140246" y="3998742"/>
             <a:ext cx="1999265" cy="230832"/>
           </a:xfrm>
           <a:prstGeom prst="rect">
@@ -12134,7 +12026,7 @@
         </p:nvSpPr>
         <p:spPr>
           <a:xfrm>
-            <a:off x="23643" y="2865627"/>
+            <a:off x="23643" y="4114805"/>
             <a:ext cx="2528256" cy="230832"/>
           </a:xfrm>
           <a:prstGeom prst="rect">
@@ -12178,7 +12070,7 @@
         </p:nvSpPr>
         <p:spPr>
           <a:xfrm>
-            <a:off x="7061" y="1841031"/>
+            <a:off x="7061" y="3090209"/>
             <a:ext cx="2891346" cy="230832"/>
           </a:xfrm>
           <a:prstGeom prst="rect">
@@ -12237,7 +12129,7 @@
         </p:nvSpPr>
         <p:spPr>
           <a:xfrm>
-            <a:off x="7064" y="2616193"/>
+            <a:off x="7064" y="3865371"/>
             <a:ext cx="3047676" cy="230832"/>
           </a:xfrm>
           <a:prstGeom prst="rect">
@@ -12296,7 +12188,7 @@
         </p:nvSpPr>
         <p:spPr>
           <a:xfrm>
-            <a:off x="152728" y="2087880"/>
+            <a:off x="152728" y="3337058"/>
             <a:ext cx="2307042" cy="230832"/>
           </a:xfrm>
           <a:prstGeom prst="rect">
@@ -12340,7 +12232,7 @@
         </p:nvSpPr>
         <p:spPr>
           <a:xfrm>
-            <a:off x="189342" y="3118547"/>
+            <a:off x="189342" y="4367725"/>
             <a:ext cx="2018501" cy="230832"/>
           </a:xfrm>
           <a:prstGeom prst="rect">
@@ -12392,7 +12284,7 @@
         </p:nvSpPr>
         <p:spPr>
           <a:xfrm>
-            <a:off x="152728" y="2210000"/>
+            <a:off x="152728" y="3459178"/>
             <a:ext cx="1925527" cy="230832"/>
           </a:xfrm>
           <a:prstGeom prst="rect">
@@ -12436,7 +12328,7 @@
         </p:nvSpPr>
         <p:spPr>
           <a:xfrm>
-            <a:off x="106812" y="3218574"/>
+            <a:off x="106812" y="4467752"/>
             <a:ext cx="2455413" cy="230832"/>
           </a:xfrm>
           <a:prstGeom prst="rect">
@@ -12494,7 +12386,7 @@
         </p:nvCxnSpPr>
         <p:spPr>
           <a:xfrm>
-            <a:off x="4534183" y="3102442"/>
+            <a:off x="6256409" y="3367577"/>
             <a:ext cx="440233" cy="1068"/>
           </a:xfrm>
           <a:prstGeom prst="straightConnector1">
@@ -12539,7 +12431,7 @@
         </p:nvCxnSpPr>
         <p:spPr>
           <a:xfrm>
-            <a:off x="2934956" y="3102442"/>
+            <a:off x="4657182" y="3367577"/>
             <a:ext cx="624840" cy="0"/>
           </a:xfrm>
           <a:prstGeom prst="straightConnector1">
@@ -12581,7 +12473,7 @@
         </p:nvGrpSpPr>
         <p:grpSpPr>
           <a:xfrm>
-            <a:off x="4280258" y="3049633"/>
+            <a:off x="6002484" y="3314768"/>
             <a:ext cx="882229" cy="424176"/>
             <a:chOff x="1855393" y="1157780"/>
             <a:chExt cx="882229" cy="424176"/>
@@ -12718,7 +12610,7 @@
         </p:nvGrpSpPr>
         <p:grpSpPr>
           <a:xfrm>
-            <a:off x="2653057" y="3057974"/>
+            <a:off x="4375283" y="3333103"/>
             <a:ext cx="1047784" cy="421901"/>
             <a:chOff x="56514" y="1166121"/>
             <a:chExt cx="1047784" cy="421901"/>
@@ -12856,7 +12748,7 @@
         </p:nvSpPr>
         <p:spPr>
           <a:xfrm>
-            <a:off x="131147" y="3326794"/>
+            <a:off x="131147" y="4575972"/>
             <a:ext cx="2434253" cy="235556"/>
           </a:xfrm>
           <a:prstGeom prst="rect">
@@ -12910,7 +12802,7 @@
         </p:nvGrpSpPr>
         <p:grpSpPr>
           <a:xfrm>
-            <a:off x="4259696" y="2536732"/>
+            <a:off x="5981922" y="2801867"/>
             <a:ext cx="780064" cy="311336"/>
             <a:chOff x="4262871" y="2536732"/>
             <a:chExt cx="780064" cy="311336"/>
@@ -13080,7 +12972,7 @@
         </p:nvGrpSpPr>
         <p:grpSpPr>
           <a:xfrm>
-            <a:off x="4362450" y="3555633"/>
+            <a:off x="6084676" y="3820768"/>
             <a:ext cx="601975" cy="230832"/>
             <a:chOff x="4349750" y="3749308"/>
             <a:chExt cx="601975" cy="230832"/>
@@ -13201,7 +13093,7 @@
         </p:nvSpPr>
         <p:spPr>
           <a:xfrm>
-            <a:off x="4325" y="3012960"/>
+            <a:off x="4325" y="4262138"/>
             <a:ext cx="2399221" cy="230832"/>
           </a:xfrm>
           <a:prstGeom prst="rect">
@@ -13244,7 +13136,7 @@
         </p:nvSpPr>
         <p:spPr>
           <a:xfrm>
-            <a:off x="4325" y="3468213"/>
+            <a:off x="4325" y="4717391"/>
             <a:ext cx="2399221" cy="230832"/>
           </a:xfrm>
           <a:prstGeom prst="rect">
@@ -13279,7 +13171,7 @@
         </p:nvSpPr>
         <p:spPr>
           <a:xfrm>
-            <a:off x="176769" y="3565380"/>
+            <a:off x="176769" y="4814558"/>
             <a:ext cx="1249060" cy="230832"/>
           </a:xfrm>
           <a:prstGeom prst="rect">
@@ -13315,7 +13207,7 @@
         </p:nvSpPr>
         <p:spPr>
           <a:xfrm>
-            <a:off x="201317" y="3693232"/>
+            <a:off x="201317" y="4942410"/>
             <a:ext cx="1370888" cy="230832"/>
           </a:xfrm>
           <a:prstGeom prst="rect">
@@ -13352,9 +13244,9 @@
         <p:grpSpPr>
           <a:xfrm>
             <a:off x="2777405" y="763754"/>
-            <a:ext cx="909847" cy="601652"/>
+            <a:ext cx="909847" cy="700077"/>
             <a:chOff x="2924693" y="757617"/>
-            <a:chExt cx="909847" cy="601652"/>
+            <a:chExt cx="909847" cy="700077"/>
           </a:xfrm>
         </p:grpSpPr>
         <p:grpSp>
@@ -13372,9 +13264,9 @@
           <p:grpSpPr>
             <a:xfrm>
               <a:off x="2987118" y="757617"/>
-              <a:ext cx="786201" cy="601652"/>
+              <a:ext cx="792764" cy="700077"/>
               <a:chOff x="3287831" y="757617"/>
-              <a:chExt cx="786201" cy="601652"/>
+              <a:chExt cx="792764" cy="700077"/>
             </a:xfrm>
           </p:grpSpPr>
           <p:sp>
@@ -13431,7 +13323,7 @@
             </p:nvSpPr>
             <p:spPr>
               <a:xfrm>
-                <a:off x="3287831" y="1037900"/>
+                <a:off x="3287831" y="1133150"/>
                 <a:ext cx="780064" cy="230832"/>
               </a:xfrm>
               <a:prstGeom prst="rect">
@@ -13472,7 +13364,7 @@
             </p:nvSpPr>
             <p:spPr>
               <a:xfrm>
-                <a:off x="3293968" y="1128437"/>
+                <a:off x="3293968" y="1226862"/>
                 <a:ext cx="780064" cy="230832"/>
               </a:xfrm>
               <a:prstGeom prst="rect">
@@ -13490,6 +13382,42 @@
                 <a:r>
                   <a:rPr lang="en-US" sz="900" dirty="0"/>
                   <a:t>losses</a:t>
+                </a:r>
+              </a:p>
+            </p:txBody>
+          </p:sp>
+          <p:sp>
+            <p:nvSpPr>
+              <p:cNvPr id="29" name="TextBox 28">
+                <a:extLst>
+                  <a:ext uri="{FF2B5EF4-FFF2-40B4-BE49-F238E27FC236}">
+                    <a16:creationId xmlns:a16="http://schemas.microsoft.com/office/drawing/2014/main" id="{34EC1D01-5554-C120-845E-CA961AD62E6D}"/>
+                  </a:ext>
+                </a:extLst>
+              </p:cNvPr>
+              <p:cNvSpPr txBox="1"/>
+              <p:nvPr/>
+            </p:nvSpPr>
+            <p:spPr>
+              <a:xfrm>
+                <a:off x="3300531" y="1037900"/>
+                <a:ext cx="780064" cy="230832"/>
+              </a:xfrm>
+              <a:prstGeom prst="rect">
+                <a:avLst/>
+              </a:prstGeom>
+              <a:noFill/>
+            </p:spPr>
+            <p:txBody>
+              <a:bodyPr wrap="square">
+                <a:spAutoFit/>
+              </a:bodyPr>
+              <a:lstStyle/>
+              <a:p>
+                <a:pPr algn="ctr"/>
+                <a:r>
+                  <a:rPr lang="en-US" sz="900" dirty="0"/>
+                  <a:t>w/o elect;</a:t>
                 </a:r>
               </a:p>
             </p:txBody>
@@ -13590,8 +13518,8 @@
         </p:nvCxnSpPr>
         <p:spPr>
           <a:xfrm>
-            <a:off x="5686593" y="3103510"/>
-            <a:ext cx="657057" cy="0"/>
+            <a:off x="7408819" y="3368645"/>
+            <a:ext cx="1490252" cy="0"/>
           </a:xfrm>
           <a:prstGeom prst="straightConnector1">
             <a:avLst/>
@@ -13632,7 +13560,7 @@
         </p:nvGrpSpPr>
         <p:grpSpPr>
           <a:xfrm>
-            <a:off x="5531042" y="3049599"/>
+            <a:off x="7634269" y="3314734"/>
             <a:ext cx="940430" cy="418448"/>
             <a:chOff x="7481127" y="1157780"/>
             <a:chExt cx="940430" cy="418448"/>
@@ -13773,8 +13701,8 @@
         </p:nvCxnSpPr>
         <p:spPr>
           <a:xfrm flipV="1">
-            <a:off x="7169268" y="1948211"/>
-            <a:ext cx="821143" cy="2827"/>
+            <a:off x="9724258" y="2186131"/>
+            <a:ext cx="821143" cy="435"/>
           </a:xfrm>
           <a:prstGeom prst="straightConnector1">
             <a:avLst/>
@@ -13818,7 +13746,7 @@
         </p:nvCxnSpPr>
         <p:spPr>
           <a:xfrm>
-            <a:off x="8859483" y="1948211"/>
+            <a:off x="11414473" y="2186131"/>
             <a:ext cx="713311" cy="0"/>
           </a:xfrm>
           <a:prstGeom prst="straightConnector1">
@@ -13860,7 +13788,7 @@
         </p:nvSpPr>
         <p:spPr>
           <a:xfrm>
-            <a:off x="182906" y="3814947"/>
+            <a:off x="182906" y="5064125"/>
             <a:ext cx="1228221" cy="230832"/>
           </a:xfrm>
           <a:prstGeom prst="rect">
@@ -13896,7 +13824,7 @@
         </p:nvSpPr>
         <p:spPr>
           <a:xfrm>
-            <a:off x="152728" y="2316480"/>
+            <a:off x="152728" y="3565658"/>
             <a:ext cx="1895071" cy="230832"/>
           </a:xfrm>
           <a:prstGeom prst="rect">
@@ -13940,7 +13868,7 @@
         </p:nvSpPr>
         <p:spPr>
           <a:xfrm>
-            <a:off x="79084" y="2432058"/>
+            <a:off x="79084" y="3681236"/>
             <a:ext cx="2821606" cy="230832"/>
           </a:xfrm>
           <a:prstGeom prst="rect">
@@ -13984,7 +13912,7 @@
         </p:nvGrpSpPr>
         <p:grpSpPr>
           <a:xfrm>
-            <a:off x="7037120" y="1896241"/>
+            <a:off x="9592110" y="2161376"/>
             <a:ext cx="1113230" cy="620262"/>
             <a:chOff x="9529495" y="2048006"/>
             <a:chExt cx="1113230" cy="620262"/>
@@ -14224,7 +14152,7 @@
         </p:nvGrpSpPr>
         <p:grpSpPr>
           <a:xfrm>
-            <a:off x="8648065" y="1898015"/>
+            <a:off x="11203055" y="2163150"/>
             <a:ext cx="1113230" cy="620262"/>
             <a:chOff x="9529495" y="2048006"/>
             <a:chExt cx="1113230" cy="620262"/>
@@ -14464,7 +14392,7 @@
         </p:nvSpPr>
         <p:spPr>
           <a:xfrm>
-            <a:off x="646335" y="935167"/>
+            <a:off x="646335" y="125698"/>
             <a:ext cx="869072" cy="550844"/>
           </a:xfrm>
           <a:prstGeom prst="roundRect">
@@ -14631,7 +14559,7 @@
         </p:nvSpPr>
         <p:spPr>
           <a:xfrm>
-            <a:off x="3559964" y="536579"/>
+            <a:off x="4788881" y="623914"/>
             <a:ext cx="947451" cy="550844"/>
           </a:xfrm>
           <a:prstGeom prst="roundRect">
@@ -14666,7 +14594,7 @@
                   <a:schemeClr val="tx1"/>
                 </a:solidFill>
               </a:rPr>
-              <a:t>Endogenize </a:t>
+              <a:t>Calculate</a:t>
             </a:r>
           </a:p>
           <a:p>
@@ -14677,18 +14605,18 @@
                   <a:schemeClr val="tx1"/>
                 </a:solidFill>
               </a:rPr>
-              <a:t>energy </a:t>
+              <a:t>waste heat</a:t>
             </a:r>
           </a:p>
           <a:p>
             <a:pPr algn="ctr"/>
             <a:r>
-              <a:rPr lang="en-US" sz="1000" dirty="0">
+              <a:rPr lang="en-US" sz="600" dirty="0">
                 <a:solidFill>
                   <a:schemeClr val="tx1"/>
                 </a:solidFill>
               </a:rPr>
-              <a:t>losses</a:t>
+              <a:t>(endogenize losses)</a:t>
             </a:r>
           </a:p>
         </p:txBody>
@@ -14707,7 +14635,7 @@
         </p:nvSpPr>
         <p:spPr>
           <a:xfrm>
-            <a:off x="3559796" y="2827020"/>
+            <a:off x="5282022" y="3092155"/>
             <a:ext cx="974387" cy="550844"/>
           </a:xfrm>
           <a:prstGeom prst="roundRect">
@@ -14783,7 +14711,7 @@
         </p:nvSpPr>
         <p:spPr>
           <a:xfrm>
-            <a:off x="4974416" y="2470696"/>
+            <a:off x="6696642" y="2735831"/>
             <a:ext cx="712177" cy="1265627"/>
           </a:xfrm>
           <a:prstGeom prst="roundRect">
@@ -14837,8 +14765,8 @@
         </p:nvSpPr>
         <p:spPr>
           <a:xfrm>
-            <a:off x="6351307" y="654050"/>
-            <a:ext cx="817961" cy="2593975"/>
+            <a:off x="8906297" y="859971"/>
+            <a:ext cx="817961" cy="2653189"/>
           </a:xfrm>
           <a:prstGeom prst="roundRect">
             <a:avLst/>
@@ -14917,7 +14845,7 @@
         </p:nvSpPr>
         <p:spPr>
           <a:xfrm>
-            <a:off x="7990411" y="1672789"/>
+            <a:off x="10545401" y="1910709"/>
             <a:ext cx="869072" cy="550844"/>
           </a:xfrm>
           <a:prstGeom prst="roundRect">
@@ -14995,7 +14923,7 @@
         </p:nvCxnSpPr>
         <p:spPr>
           <a:xfrm flipH="1">
-            <a:off x="2782335" y="1947443"/>
+            <a:off x="4259631" y="2450703"/>
             <a:ext cx="3375577" cy="0"/>
           </a:xfrm>
           <a:prstGeom prst="line">
@@ -15040,7 +14968,7 @@
         </p:nvSpPr>
         <p:spPr>
           <a:xfrm>
-            <a:off x="3027502" y="1675775"/>
+            <a:off x="4504798" y="2179035"/>
             <a:ext cx="2709653" cy="307777"/>
           </a:xfrm>
           <a:prstGeom prst="rect">
@@ -15081,7 +15009,7 @@
         </p:nvSpPr>
         <p:spPr>
           <a:xfrm>
-            <a:off x="3034128" y="1907686"/>
+            <a:off x="4511424" y="2410946"/>
             <a:ext cx="2553520" cy="307777"/>
           </a:xfrm>
           <a:prstGeom prst="rect">
@@ -15124,7 +15052,7 @@
         </p:nvCxnSpPr>
         <p:spPr>
           <a:xfrm flipV="1">
-            <a:off x="3076690" y="1715529"/>
+            <a:off x="4553986" y="2215614"/>
             <a:ext cx="0" cy="207161"/>
           </a:xfrm>
           <a:prstGeom prst="straightConnector1">
@@ -15170,7 +15098,7 @@
         </p:nvCxnSpPr>
         <p:spPr>
           <a:xfrm>
-            <a:off x="3076690" y="1980571"/>
+            <a:off x="4553986" y="2480656"/>
             <a:ext cx="0" cy="207161"/>
           </a:xfrm>
           <a:prstGeom prst="straightConnector1">
@@ -15214,7 +15142,7 @@
         </p:nvSpPr>
         <p:spPr>
           <a:xfrm>
-            <a:off x="7251283" y="2502314"/>
+            <a:off x="9806273" y="2767449"/>
             <a:ext cx="2346412" cy="523220"/>
           </a:xfrm>
           <a:prstGeom prst="rect">
@@ -15269,7 +15197,7 @@
         </p:nvSpPr>
         <p:spPr>
           <a:xfrm>
-            <a:off x="4335831" y="2785825"/>
+            <a:off x="6058057" y="3050960"/>
             <a:ext cx="245580" cy="230832"/>
           </a:xfrm>
           <a:prstGeom prst="rect">
@@ -15304,7 +15232,7 @@
         </p:nvSpPr>
         <p:spPr>
           <a:xfrm>
-            <a:off x="5487410" y="2441310"/>
+            <a:off x="7209636" y="2706445"/>
             <a:ext cx="245580" cy="230832"/>
           </a:xfrm>
           <a:prstGeom prst="rect">
@@ -15339,7 +15267,7 @@
         </p:nvSpPr>
         <p:spPr>
           <a:xfrm>
-            <a:off x="1329209" y="896232"/>
+            <a:off x="1329209" y="86763"/>
             <a:ext cx="245580" cy="230832"/>
           </a:xfrm>
           <a:prstGeom prst="rect">
@@ -15409,7 +15337,7 @@
         </p:nvSpPr>
         <p:spPr>
           <a:xfrm>
-            <a:off x="4310598" y="498580"/>
+            <a:off x="5540868" y="582740"/>
             <a:ext cx="245580" cy="230832"/>
           </a:xfrm>
           <a:prstGeom prst="rect">
@@ -15425,7 +15353,7 @@
           <a:p>
             <a:r>
               <a:rPr lang="en-US" sz="900" i="1" dirty="0"/>
-              <a:t>5</a:t>
+              <a:t>6</a:t>
             </a:r>
           </a:p>
         </p:txBody>
@@ -15444,8 +15372,8 @@
         </p:nvSpPr>
         <p:spPr>
           <a:xfrm>
-            <a:off x="8677866" y="1632478"/>
-            <a:ext cx="239168" cy="215444"/>
+            <a:off x="11178426" y="1870398"/>
+            <a:ext cx="293670" cy="215444"/>
           </a:xfrm>
           <a:prstGeom prst="rect">
             <a:avLst/>
@@ -15460,17 +15388,52 @@
           <a:p>
             <a:r>
               <a:rPr lang="en-US" sz="800" i="1" dirty="0"/>
-              <a:t>8</a:t>
-            </a:r>
-          </a:p>
-        </p:txBody>
-      </p:sp>
-      <p:sp>
-        <p:nvSpPr>
-          <p:cNvPr id="126" name="Rounded Rectangle 125">
-            <a:extLst>
-              <a:ext uri="{FF2B5EF4-FFF2-40B4-BE49-F238E27FC236}">
-                <a16:creationId xmlns:a16="http://schemas.microsoft.com/office/drawing/2014/main" id="{FE694773-EF69-E3C3-0C44-034FAD8F6EEA}"/>
+              <a:t>12</a:t>
+            </a:r>
+          </a:p>
+        </p:txBody>
+      </p:sp>
+      <p:sp>
+        <p:nvSpPr>
+          <p:cNvPr id="156" name="TextBox 155">
+            <a:extLst>
+              <a:ext uri="{FF2B5EF4-FFF2-40B4-BE49-F238E27FC236}">
+                <a16:creationId xmlns:a16="http://schemas.microsoft.com/office/drawing/2014/main" id="{0B6633B8-496C-6C24-92F8-24CCF80B5795}"/>
+              </a:ext>
+            </a:extLst>
+          </p:cNvPr>
+          <p:cNvSpPr txBox="1"/>
+          <p:nvPr/>
+        </p:nvSpPr>
+        <p:spPr>
+          <a:xfrm>
+            <a:off x="9457895" y="910796"/>
+            <a:ext cx="306494" cy="230832"/>
+          </a:xfrm>
+          <a:prstGeom prst="rect">
+            <a:avLst/>
+          </a:prstGeom>
+          <a:noFill/>
+        </p:spPr>
+        <p:txBody>
+          <a:bodyPr wrap="none" rtlCol="0">
+            <a:spAutoFit/>
+          </a:bodyPr>
+          <a:lstStyle/>
+          <a:p>
+            <a:r>
+              <a:rPr lang="en-US" sz="900" i="1" dirty="0"/>
+              <a:t>11</a:t>
+            </a:r>
+          </a:p>
+        </p:txBody>
+      </p:sp>
+      <p:sp>
+        <p:nvSpPr>
+          <p:cNvPr id="34" name="Rounded Rectangle 33">
+            <a:extLst>
+              <a:ext uri="{FF2B5EF4-FFF2-40B4-BE49-F238E27FC236}">
+                <a16:creationId xmlns:a16="http://schemas.microsoft.com/office/drawing/2014/main" id="{7EC2EFF6-035D-EF22-46C2-ADB0D8023E67}"/>
               </a:ext>
             </a:extLst>
           </p:cNvPr>
@@ -15479,8 +15442,8 @@
         </p:nvSpPr>
         <p:spPr>
           <a:xfrm>
-            <a:off x="4974416" y="174625"/>
-            <a:ext cx="712177" cy="1265627"/>
+            <a:off x="3673443" y="212728"/>
+            <a:ext cx="885857" cy="1733547"/>
           </a:xfrm>
           <a:prstGeom prst="roundRect">
             <a:avLst/>
@@ -15509,6 +15472,320 @@
           <a:p>
             <a:pPr algn="ctr"/>
             <a:r>
+              <a:rPr lang="en-US" sz="1000" b="1" dirty="0">
+                <a:solidFill>
+                  <a:srgbClr val="C00000"/>
+                </a:solidFill>
+              </a:rPr>
+              <a:t>E</a:t>
+            </a:r>
+            <a:r>
+              <a:rPr lang="en-US" sz="1000" dirty="0">
+                <a:solidFill>
+                  <a:schemeClr val="tx1"/>
+                </a:solidFill>
+              </a:rPr>
+              <a:t> + </a:t>
+            </a:r>
+            <a:r>
+              <a:rPr lang="en-US" sz="1000" b="1" dirty="0" err="1">
+                <a:solidFill>
+                  <a:srgbClr val="C00000"/>
+                </a:solidFill>
+              </a:rPr>
+              <a:t>E</a:t>
+            </a:r>
+            <a:r>
+              <a:rPr lang="en-US" sz="1000" baseline="-25000" dirty="0" err="1">
+                <a:solidFill>
+                  <a:srgbClr val="C00000"/>
+                </a:solidFill>
+              </a:rPr>
+              <a:t>massless</a:t>
+            </a:r>
+            <a:endParaRPr lang="en-US" sz="1000" baseline="-25000" dirty="0">
+              <a:solidFill>
+                <a:srgbClr val="C00000"/>
+              </a:solidFill>
+            </a:endParaRPr>
+          </a:p>
+        </p:txBody>
+      </p:sp>
+      <p:sp>
+        <p:nvSpPr>
+          <p:cNvPr id="40" name="TextBox 39">
+            <a:extLst>
+              <a:ext uri="{FF2B5EF4-FFF2-40B4-BE49-F238E27FC236}">
+                <a16:creationId xmlns:a16="http://schemas.microsoft.com/office/drawing/2014/main" id="{B111EC54-612F-0F08-F0BF-123031CE3A52}"/>
+              </a:ext>
+            </a:extLst>
+          </p:cNvPr>
+          <p:cNvSpPr txBox="1"/>
+          <p:nvPr/>
+        </p:nvSpPr>
+        <p:spPr>
+          <a:xfrm>
+            <a:off x="2015710" y="2612750"/>
+            <a:ext cx="781847" cy="369332"/>
+          </a:xfrm>
+          <a:prstGeom prst="rect">
+            <a:avLst/>
+          </a:prstGeom>
+          <a:noFill/>
+        </p:spPr>
+        <p:txBody>
+          <a:bodyPr wrap="square" rtlCol="0">
+            <a:spAutoFit/>
+          </a:bodyPr>
+          <a:lstStyle/>
+          <a:p>
+            <a:pPr algn="ctr"/>
+            <a:r>
+              <a:rPr lang="en-US" sz="900" b="1" dirty="0" err="1">
+                <a:solidFill>
+                  <a:srgbClr val="C00000"/>
+                </a:solidFill>
+              </a:rPr>
+              <a:t>E</a:t>
+            </a:r>
+            <a:r>
+              <a:rPr lang="en-US" sz="900" baseline="-25000" dirty="0" err="1">
+                <a:solidFill>
+                  <a:srgbClr val="C00000"/>
+                </a:solidFill>
+              </a:rPr>
+              <a:t>massless</a:t>
+            </a:r>
+            <a:endParaRPr lang="en-US" sz="900" baseline="-25000" dirty="0">
+              <a:solidFill>
+                <a:srgbClr val="C00000"/>
+              </a:solidFill>
+            </a:endParaRPr>
+          </a:p>
+          <a:p>
+            <a:pPr algn="ctr"/>
+            <a:r>
+              <a:rPr lang="en-US" sz="900" dirty="0"/>
+              <a:t>(electricity)</a:t>
+            </a:r>
+          </a:p>
+        </p:txBody>
+      </p:sp>
+      <p:cxnSp>
+        <p:nvCxnSpPr>
+          <p:cNvPr id="44" name="Elbow Connector 43">
+            <a:extLst>
+              <a:ext uri="{FF2B5EF4-FFF2-40B4-BE49-F238E27FC236}">
+                <a16:creationId xmlns:a16="http://schemas.microsoft.com/office/drawing/2014/main" id="{B2670B38-16A3-1C92-6A92-53287799BD4D}"/>
+              </a:ext>
+            </a:extLst>
+          </p:cNvPr>
+          <p:cNvCxnSpPr>
+            <a:cxnSpLocks/>
+          </p:cNvCxnSpPr>
+          <p:nvPr/>
+        </p:nvCxnSpPr>
+        <p:spPr>
+          <a:xfrm flipV="1">
+            <a:off x="2616582" y="1749425"/>
+            <a:ext cx="1047368" cy="978141"/>
+          </a:xfrm>
+          <a:prstGeom prst="bentConnector3">
+            <a:avLst>
+              <a:gd name="adj1" fmla="val 50000"/>
+            </a:avLst>
+          </a:prstGeom>
+          <a:ln>
+            <a:solidFill>
+              <a:srgbClr val="C00000"/>
+            </a:solidFill>
+            <a:tailEnd type="triangle"/>
+          </a:ln>
+        </p:spPr>
+        <p:style>
+          <a:lnRef idx="2">
+            <a:schemeClr val="accent1"/>
+          </a:lnRef>
+          <a:fillRef idx="0">
+            <a:schemeClr val="accent1"/>
+          </a:fillRef>
+          <a:effectRef idx="1">
+            <a:schemeClr val="accent1"/>
+          </a:effectRef>
+          <a:fontRef idx="minor">
+            <a:schemeClr val="tx1"/>
+          </a:fontRef>
+        </p:style>
+      </p:cxnSp>
+      <p:sp>
+        <p:nvSpPr>
+          <p:cNvPr id="74" name="TextBox 73">
+            <a:extLst>
+              <a:ext uri="{FF2B5EF4-FFF2-40B4-BE49-F238E27FC236}">
+                <a16:creationId xmlns:a16="http://schemas.microsoft.com/office/drawing/2014/main" id="{B3AB2EF8-92F9-7944-8A49-3AA70E000767}"/>
+              </a:ext>
+            </a:extLst>
+          </p:cNvPr>
+          <p:cNvSpPr txBox="1"/>
+          <p:nvPr/>
+        </p:nvSpPr>
+        <p:spPr>
+          <a:xfrm>
+            <a:off x="4340497" y="206311"/>
+            <a:ext cx="245580" cy="230832"/>
+          </a:xfrm>
+          <a:prstGeom prst="rect">
+            <a:avLst/>
+          </a:prstGeom>
+          <a:noFill/>
+        </p:spPr>
+        <p:txBody>
+          <a:bodyPr wrap="none" rtlCol="0">
+            <a:spAutoFit/>
+          </a:bodyPr>
+          <a:lstStyle/>
+          <a:p>
+            <a:r>
+              <a:rPr lang="en-US" sz="900" i="1" dirty="0"/>
+              <a:t>5</a:t>
+            </a:r>
+          </a:p>
+        </p:txBody>
+      </p:sp>
+      <p:cxnSp>
+        <p:nvCxnSpPr>
+          <p:cNvPr id="75" name="Straight Arrow Connector 74">
+            <a:extLst>
+              <a:ext uri="{FF2B5EF4-FFF2-40B4-BE49-F238E27FC236}">
+                <a16:creationId xmlns:a16="http://schemas.microsoft.com/office/drawing/2014/main" id="{19049AA9-0BB9-807E-EF76-9D50C04496A3}"/>
+              </a:ext>
+            </a:extLst>
+          </p:cNvPr>
+          <p:cNvCxnSpPr>
+            <a:cxnSpLocks/>
+            <a:endCxn id="39" idx="1"/>
+          </p:cNvCxnSpPr>
+          <p:nvPr/>
+        </p:nvCxnSpPr>
+        <p:spPr>
+          <a:xfrm>
+            <a:off x="4559300" y="898527"/>
+            <a:ext cx="229581" cy="809"/>
+          </a:xfrm>
+          <a:prstGeom prst="straightConnector1">
+            <a:avLst/>
+          </a:prstGeom>
+          <a:ln>
+            <a:solidFill>
+              <a:srgbClr val="C00000"/>
+            </a:solidFill>
+            <a:tailEnd type="triangle"/>
+          </a:ln>
+        </p:spPr>
+        <p:style>
+          <a:lnRef idx="2">
+            <a:schemeClr val="accent1"/>
+          </a:lnRef>
+          <a:fillRef idx="0">
+            <a:schemeClr val="accent1"/>
+          </a:fillRef>
+          <a:effectRef idx="1">
+            <a:schemeClr val="accent1"/>
+          </a:effectRef>
+          <a:fontRef idx="minor">
+            <a:schemeClr val="tx1"/>
+          </a:fontRef>
+        </p:style>
+      </p:cxnSp>
+      <p:cxnSp>
+        <p:nvCxnSpPr>
+          <p:cNvPr id="83" name="Straight Arrow Connector 82">
+            <a:extLst>
+              <a:ext uri="{FF2B5EF4-FFF2-40B4-BE49-F238E27FC236}">
+                <a16:creationId xmlns:a16="http://schemas.microsoft.com/office/drawing/2014/main" id="{C744EA2F-5E24-1095-FEB0-6D25BB555BE8}"/>
+              </a:ext>
+            </a:extLst>
+          </p:cNvPr>
+          <p:cNvCxnSpPr>
+            <a:cxnSpLocks/>
+            <a:stCxn id="39" idx="3"/>
+          </p:cNvCxnSpPr>
+          <p:nvPr/>
+        </p:nvCxnSpPr>
+        <p:spPr>
+          <a:xfrm>
+            <a:off x="5736332" y="899336"/>
+            <a:ext cx="315218" cy="0"/>
+          </a:xfrm>
+          <a:prstGeom prst="straightConnector1">
+            <a:avLst/>
+          </a:prstGeom>
+          <a:ln>
+            <a:solidFill>
+              <a:srgbClr val="C00000"/>
+            </a:solidFill>
+            <a:tailEnd type="triangle"/>
+          </a:ln>
+        </p:spPr>
+        <p:style>
+          <a:lnRef idx="2">
+            <a:schemeClr val="accent1"/>
+          </a:lnRef>
+          <a:fillRef idx="0">
+            <a:schemeClr val="accent1"/>
+          </a:fillRef>
+          <a:effectRef idx="1">
+            <a:schemeClr val="accent1"/>
+          </a:effectRef>
+          <a:fontRef idx="minor">
+            <a:schemeClr val="tx1"/>
+          </a:fontRef>
+        </p:style>
+      </p:cxnSp>
+      <p:sp>
+        <p:nvSpPr>
+          <p:cNvPr id="90" name="Rounded Rectangle 89">
+            <a:extLst>
+              <a:ext uri="{FF2B5EF4-FFF2-40B4-BE49-F238E27FC236}">
+                <a16:creationId xmlns:a16="http://schemas.microsoft.com/office/drawing/2014/main" id="{3510FB58-05A4-0E9B-BA3C-0A4A0A1999DE}"/>
+              </a:ext>
+            </a:extLst>
+          </p:cNvPr>
+          <p:cNvSpPr/>
+          <p:nvPr/>
+        </p:nvSpPr>
+        <p:spPr>
+          <a:xfrm>
+            <a:off x="6058882" y="49239"/>
+            <a:ext cx="738794" cy="550844"/>
+          </a:xfrm>
+          <a:prstGeom prst="roundRect">
+            <a:avLst/>
+          </a:prstGeom>
+          <a:noFill/>
+        </p:spPr>
+        <p:style>
+          <a:lnRef idx="2">
+            <a:schemeClr val="accent1">
+              <a:shade val="15000"/>
+            </a:schemeClr>
+          </a:lnRef>
+          <a:fillRef idx="1">
+            <a:schemeClr val="accent1"/>
+          </a:fillRef>
+          <a:effectRef idx="0">
+            <a:schemeClr val="accent1"/>
+          </a:effectRef>
+          <a:fontRef idx="minor">
+            <a:schemeClr val="lt1"/>
+          </a:fontRef>
+        </p:style>
+        <p:txBody>
+          <a:bodyPr rtlCol="0" anchor="ctr"/>
+          <a:lstStyle/>
+          <a:p>
+            <a:pPr algn="ctr"/>
+            <a:r>
               <a:rPr lang="en-US" sz="1000" dirty="0">
                 <a:solidFill>
                   <a:schemeClr val="tx1"/>
@@ -15516,15 +15793,785 @@
               </a:rPr>
               <a:t>Convert to exergy</a:t>
             </a:r>
-          </a:p>
-        </p:txBody>
-      </p:sp>
-      <p:sp>
-        <p:nvSpPr>
-          <p:cNvPr id="154" name="TextBox 153">
-            <a:extLst>
-              <a:ext uri="{FF2B5EF4-FFF2-40B4-BE49-F238E27FC236}">
-                <a16:creationId xmlns:a16="http://schemas.microsoft.com/office/drawing/2014/main" id="{4F550D29-0158-CC61-5677-861F54EC8D36}"/>
+            <a:endParaRPr lang="en-US" sz="600" dirty="0">
+              <a:solidFill>
+                <a:schemeClr val="tx1"/>
+              </a:solidFill>
+            </a:endParaRPr>
+          </a:p>
+        </p:txBody>
+      </p:sp>
+      <p:cxnSp>
+        <p:nvCxnSpPr>
+          <p:cNvPr id="98" name="Straight Arrow Connector 97">
+            <a:extLst>
+              <a:ext uri="{FF2B5EF4-FFF2-40B4-BE49-F238E27FC236}">
+                <a16:creationId xmlns:a16="http://schemas.microsoft.com/office/drawing/2014/main" id="{DE303CE6-8B9F-F2CC-174C-AFFD846C3943}"/>
+              </a:ext>
+            </a:extLst>
+          </p:cNvPr>
+          <p:cNvCxnSpPr>
+            <a:cxnSpLocks/>
+          </p:cNvCxnSpPr>
+          <p:nvPr/>
+        </p:nvCxnSpPr>
+        <p:spPr>
+          <a:xfrm flipV="1">
+            <a:off x="1921807" y="69850"/>
+            <a:ext cx="0" cy="334445"/>
+          </a:xfrm>
+          <a:prstGeom prst="straightConnector1">
+            <a:avLst/>
+          </a:prstGeom>
+          <a:ln>
+            <a:solidFill>
+              <a:srgbClr val="C00000"/>
+            </a:solidFill>
+            <a:tailEnd type="none"/>
+          </a:ln>
+        </p:spPr>
+        <p:style>
+          <a:lnRef idx="2">
+            <a:schemeClr val="accent1"/>
+          </a:lnRef>
+          <a:fillRef idx="0">
+            <a:schemeClr val="accent1"/>
+          </a:fillRef>
+          <a:effectRef idx="1">
+            <a:schemeClr val="accent1"/>
+          </a:effectRef>
+          <a:fontRef idx="minor">
+            <a:schemeClr val="tx1"/>
+          </a:fontRef>
+        </p:style>
+      </p:cxnSp>
+      <p:cxnSp>
+        <p:nvCxnSpPr>
+          <p:cNvPr id="104" name="Straight Arrow Connector 103">
+            <a:extLst>
+              <a:ext uri="{FF2B5EF4-FFF2-40B4-BE49-F238E27FC236}">
+                <a16:creationId xmlns:a16="http://schemas.microsoft.com/office/drawing/2014/main" id="{1201D79D-5091-4045-C298-98E6076C8F6B}"/>
+              </a:ext>
+            </a:extLst>
+          </p:cNvPr>
+          <p:cNvCxnSpPr>
+            <a:cxnSpLocks/>
+          </p:cNvCxnSpPr>
+          <p:nvPr/>
+        </p:nvCxnSpPr>
+        <p:spPr>
+          <a:xfrm>
+            <a:off x="1924050" y="76200"/>
+            <a:ext cx="3838575" cy="0"/>
+          </a:xfrm>
+          <a:prstGeom prst="straightConnector1">
+            <a:avLst/>
+          </a:prstGeom>
+          <a:ln>
+            <a:solidFill>
+              <a:srgbClr val="C00000"/>
+            </a:solidFill>
+            <a:tailEnd type="none"/>
+          </a:ln>
+        </p:spPr>
+        <p:style>
+          <a:lnRef idx="2">
+            <a:schemeClr val="accent1"/>
+          </a:lnRef>
+          <a:fillRef idx="0">
+            <a:schemeClr val="accent1"/>
+          </a:fillRef>
+          <a:effectRef idx="1">
+            <a:schemeClr val="accent1"/>
+          </a:effectRef>
+          <a:fontRef idx="minor">
+            <a:schemeClr val="tx1"/>
+          </a:fontRef>
+        </p:style>
+      </p:cxnSp>
+      <p:cxnSp>
+        <p:nvCxnSpPr>
+          <p:cNvPr id="110" name="Elbow Connector 109">
+            <a:extLst>
+              <a:ext uri="{FF2B5EF4-FFF2-40B4-BE49-F238E27FC236}">
+                <a16:creationId xmlns:a16="http://schemas.microsoft.com/office/drawing/2014/main" id="{374BF507-93EE-2FE9-B859-224647A296C6}"/>
+              </a:ext>
+            </a:extLst>
+          </p:cNvPr>
+          <p:cNvCxnSpPr>
+            <a:cxnSpLocks/>
+          </p:cNvCxnSpPr>
+          <p:nvPr/>
+        </p:nvCxnSpPr>
+        <p:spPr>
+          <a:xfrm>
+            <a:off x="5756274" y="76198"/>
+            <a:ext cx="292101" cy="193677"/>
+          </a:xfrm>
+          <a:prstGeom prst="bentConnector3">
+            <a:avLst>
+              <a:gd name="adj1" fmla="val 50000"/>
+            </a:avLst>
+          </a:prstGeom>
+          <a:ln>
+            <a:solidFill>
+              <a:srgbClr val="C00000"/>
+            </a:solidFill>
+            <a:tailEnd type="triangle"/>
+          </a:ln>
+        </p:spPr>
+        <p:style>
+          <a:lnRef idx="2">
+            <a:schemeClr val="accent1"/>
+          </a:lnRef>
+          <a:fillRef idx="0">
+            <a:schemeClr val="accent1"/>
+          </a:fillRef>
+          <a:effectRef idx="1">
+            <a:schemeClr val="accent1"/>
+          </a:effectRef>
+          <a:fontRef idx="minor">
+            <a:schemeClr val="tx1"/>
+          </a:fontRef>
+        </p:style>
+      </p:cxnSp>
+      <p:sp>
+        <p:nvSpPr>
+          <p:cNvPr id="122" name="Rounded Rectangle 121">
+            <a:extLst>
+              <a:ext uri="{FF2B5EF4-FFF2-40B4-BE49-F238E27FC236}">
+                <a16:creationId xmlns:a16="http://schemas.microsoft.com/office/drawing/2014/main" id="{675FF90C-364D-855E-EC71-11145006A4B7}"/>
+              </a:ext>
+            </a:extLst>
+          </p:cNvPr>
+          <p:cNvSpPr/>
+          <p:nvPr/>
+        </p:nvSpPr>
+        <p:spPr>
+          <a:xfrm>
+            <a:off x="6055707" y="738214"/>
+            <a:ext cx="738794" cy="550844"/>
+          </a:xfrm>
+          <a:prstGeom prst="roundRect">
+            <a:avLst/>
+          </a:prstGeom>
+          <a:noFill/>
+        </p:spPr>
+        <p:style>
+          <a:lnRef idx="2">
+            <a:schemeClr val="accent1">
+              <a:shade val="15000"/>
+            </a:schemeClr>
+          </a:lnRef>
+          <a:fillRef idx="1">
+            <a:schemeClr val="accent1"/>
+          </a:fillRef>
+          <a:effectRef idx="0">
+            <a:schemeClr val="accent1"/>
+          </a:effectRef>
+          <a:fontRef idx="minor">
+            <a:schemeClr val="lt1"/>
+          </a:fontRef>
+        </p:style>
+        <p:txBody>
+          <a:bodyPr rtlCol="0" anchor="ctr"/>
+          <a:lstStyle/>
+          <a:p>
+            <a:pPr algn="ctr"/>
+            <a:r>
+              <a:rPr lang="en-US" sz="1000" dirty="0">
+                <a:solidFill>
+                  <a:schemeClr val="tx1"/>
+                </a:solidFill>
+              </a:rPr>
+              <a:t>Convert to exergy</a:t>
+            </a:r>
+            <a:endParaRPr lang="en-US" sz="600" dirty="0">
+              <a:solidFill>
+                <a:schemeClr val="tx1"/>
+              </a:solidFill>
+            </a:endParaRPr>
+          </a:p>
+        </p:txBody>
+      </p:sp>
+      <p:sp>
+        <p:nvSpPr>
+          <p:cNvPr id="127" name="Rounded Rectangle 126">
+            <a:extLst>
+              <a:ext uri="{FF2B5EF4-FFF2-40B4-BE49-F238E27FC236}">
+                <a16:creationId xmlns:a16="http://schemas.microsoft.com/office/drawing/2014/main" id="{D634E914-8CD5-B659-36B2-346774E9D7B1}"/>
+              </a:ext>
+            </a:extLst>
+          </p:cNvPr>
+          <p:cNvSpPr/>
+          <p:nvPr/>
+        </p:nvSpPr>
+        <p:spPr>
+          <a:xfrm>
+            <a:off x="6055707" y="1371600"/>
+            <a:ext cx="738794" cy="550844"/>
+          </a:xfrm>
+          <a:prstGeom prst="roundRect">
+            <a:avLst/>
+          </a:prstGeom>
+          <a:noFill/>
+        </p:spPr>
+        <p:style>
+          <a:lnRef idx="2">
+            <a:schemeClr val="accent1">
+              <a:shade val="15000"/>
+            </a:schemeClr>
+          </a:lnRef>
+          <a:fillRef idx="1">
+            <a:schemeClr val="accent1"/>
+          </a:fillRef>
+          <a:effectRef idx="0">
+            <a:schemeClr val="accent1"/>
+          </a:effectRef>
+          <a:fontRef idx="minor">
+            <a:schemeClr val="lt1"/>
+          </a:fontRef>
+        </p:style>
+        <p:txBody>
+          <a:bodyPr rtlCol="0" anchor="ctr"/>
+          <a:lstStyle/>
+          <a:p>
+            <a:pPr algn="ctr"/>
+            <a:r>
+              <a:rPr lang="en-US" sz="1000" dirty="0">
+                <a:solidFill>
+                  <a:schemeClr val="tx1"/>
+                </a:solidFill>
+              </a:rPr>
+              <a:t>Convert to exergy</a:t>
+            </a:r>
+            <a:endParaRPr lang="en-US" sz="600" dirty="0">
+              <a:solidFill>
+                <a:schemeClr val="tx1"/>
+              </a:solidFill>
+            </a:endParaRPr>
+          </a:p>
+        </p:txBody>
+      </p:sp>
+      <p:cxnSp>
+        <p:nvCxnSpPr>
+          <p:cNvPr id="132" name="Elbow Connector 131">
+            <a:extLst>
+              <a:ext uri="{FF2B5EF4-FFF2-40B4-BE49-F238E27FC236}">
+                <a16:creationId xmlns:a16="http://schemas.microsoft.com/office/drawing/2014/main" id="{F841BA20-4DD1-5C64-CBB4-D5640E8E1D8A}"/>
+              </a:ext>
+            </a:extLst>
+          </p:cNvPr>
+          <p:cNvCxnSpPr>
+            <a:cxnSpLocks/>
+          </p:cNvCxnSpPr>
+          <p:nvPr/>
+        </p:nvCxnSpPr>
+        <p:spPr>
+          <a:xfrm flipV="1">
+            <a:off x="3136900" y="1993900"/>
+            <a:ext cx="1317625" cy="733425"/>
+          </a:xfrm>
+          <a:prstGeom prst="bentConnector3">
+            <a:avLst>
+              <a:gd name="adj1" fmla="val 50000"/>
+            </a:avLst>
+          </a:prstGeom>
+          <a:ln>
+            <a:solidFill>
+              <a:srgbClr val="C00000"/>
+            </a:solidFill>
+            <a:tailEnd type="none"/>
+          </a:ln>
+        </p:spPr>
+        <p:style>
+          <a:lnRef idx="2">
+            <a:schemeClr val="accent1"/>
+          </a:lnRef>
+          <a:fillRef idx="0">
+            <a:schemeClr val="accent1"/>
+          </a:fillRef>
+          <a:effectRef idx="1">
+            <a:schemeClr val="accent1"/>
+          </a:effectRef>
+          <a:fontRef idx="minor">
+            <a:schemeClr val="tx1"/>
+          </a:fontRef>
+        </p:style>
+      </p:cxnSp>
+      <p:cxnSp>
+        <p:nvCxnSpPr>
+          <p:cNvPr id="137" name="Elbow Connector 136">
+            <a:extLst>
+              <a:ext uri="{FF2B5EF4-FFF2-40B4-BE49-F238E27FC236}">
+                <a16:creationId xmlns:a16="http://schemas.microsoft.com/office/drawing/2014/main" id="{22B4A7DE-4BE6-BCDF-7C20-361B351E8776}"/>
+              </a:ext>
+            </a:extLst>
+          </p:cNvPr>
+          <p:cNvCxnSpPr>
+            <a:cxnSpLocks/>
+          </p:cNvCxnSpPr>
+          <p:nvPr/>
+        </p:nvCxnSpPr>
+        <p:spPr>
+          <a:xfrm flipV="1">
+            <a:off x="4454525" y="1816100"/>
+            <a:ext cx="1590675" cy="177800"/>
+          </a:xfrm>
+          <a:prstGeom prst="bentConnector3">
+            <a:avLst>
+              <a:gd name="adj1" fmla="val 50000"/>
+            </a:avLst>
+          </a:prstGeom>
+          <a:ln>
+            <a:solidFill>
+              <a:srgbClr val="C00000"/>
+            </a:solidFill>
+            <a:tailEnd type="triangle"/>
+          </a:ln>
+        </p:spPr>
+        <p:style>
+          <a:lnRef idx="2">
+            <a:schemeClr val="accent1"/>
+          </a:lnRef>
+          <a:fillRef idx="0">
+            <a:schemeClr val="accent1"/>
+          </a:fillRef>
+          <a:effectRef idx="1">
+            <a:schemeClr val="accent1"/>
+          </a:effectRef>
+          <a:fontRef idx="minor">
+            <a:schemeClr val="tx1"/>
+          </a:fontRef>
+        </p:style>
+      </p:cxnSp>
+      <p:grpSp>
+        <p:nvGrpSpPr>
+          <p:cNvPr id="139" name="Group 138">
+            <a:extLst>
+              <a:ext uri="{FF2B5EF4-FFF2-40B4-BE49-F238E27FC236}">
+                <a16:creationId xmlns:a16="http://schemas.microsoft.com/office/drawing/2014/main" id="{502E37F0-F95D-D182-80FF-5E3C78D5C485}"/>
+              </a:ext>
+            </a:extLst>
+          </p:cNvPr>
+          <p:cNvGrpSpPr/>
+          <p:nvPr/>
+        </p:nvGrpSpPr>
+        <p:grpSpPr>
+          <a:xfrm>
+            <a:off x="5447243" y="1524000"/>
+            <a:ext cx="603152" cy="230832"/>
+            <a:chOff x="3864936" y="1593639"/>
+            <a:chExt cx="603152" cy="230832"/>
+          </a:xfrm>
+        </p:grpSpPr>
+        <p:cxnSp>
+          <p:nvCxnSpPr>
+            <p:cNvPr id="142" name="Straight Arrow Connector 141">
+              <a:extLst>
+                <a:ext uri="{FF2B5EF4-FFF2-40B4-BE49-F238E27FC236}">
+                  <a16:creationId xmlns:a16="http://schemas.microsoft.com/office/drawing/2014/main" id="{2EB90D22-9805-A418-CFAE-719C2DBB644F}"/>
+                </a:ext>
+              </a:extLst>
+            </p:cNvPr>
+            <p:cNvCxnSpPr>
+              <a:cxnSpLocks/>
+            </p:cNvCxnSpPr>
+            <p:nvPr/>
+          </p:nvCxnSpPr>
+          <p:spPr>
+            <a:xfrm>
+              <a:off x="3864936" y="1651071"/>
+              <a:ext cx="603152" cy="0"/>
+            </a:xfrm>
+            <a:prstGeom prst="straightConnector1">
+              <a:avLst/>
+            </a:prstGeom>
+            <a:ln>
+              <a:solidFill>
+                <a:schemeClr val="accent5"/>
+              </a:solidFill>
+              <a:tailEnd type="triangle"/>
+            </a:ln>
+          </p:spPr>
+          <p:style>
+            <a:lnRef idx="2">
+              <a:schemeClr val="accent1"/>
+            </a:lnRef>
+            <a:fillRef idx="0">
+              <a:schemeClr val="accent1"/>
+            </a:fillRef>
+            <a:effectRef idx="1">
+              <a:schemeClr val="accent1"/>
+            </a:effectRef>
+            <a:fontRef idx="minor">
+              <a:schemeClr val="tx1"/>
+            </a:fontRef>
+          </p:style>
+        </p:cxnSp>
+        <p:sp>
+          <p:nvSpPr>
+            <p:cNvPr id="143" name="TextBox 142">
+              <a:extLst>
+                <a:ext uri="{FF2B5EF4-FFF2-40B4-BE49-F238E27FC236}">
+                  <a16:creationId xmlns:a16="http://schemas.microsoft.com/office/drawing/2014/main" id="{EC1B3AF9-068E-69E2-EEC8-2039B6B6937B}"/>
+                </a:ext>
+              </a:extLst>
+            </p:cNvPr>
+            <p:cNvSpPr txBox="1"/>
+            <p:nvPr/>
+          </p:nvSpPr>
+          <p:spPr>
+            <a:xfrm>
+              <a:off x="3957537" y="1593639"/>
+              <a:ext cx="410690" cy="230832"/>
+            </a:xfrm>
+            <a:prstGeom prst="rect">
+              <a:avLst/>
+            </a:prstGeom>
+            <a:noFill/>
+          </p:spPr>
+          <p:txBody>
+            <a:bodyPr wrap="none" rtlCol="0">
+              <a:spAutoFit/>
+            </a:bodyPr>
+            <a:lstStyle/>
+            <a:p>
+              <a:pPr algn="ctr"/>
+              <a:r>
+                <a:rPr lang="en-US" sz="900" b="1" dirty="0" err="1">
+                  <a:solidFill>
+                    <a:schemeClr val="accent5"/>
+                  </a:solidFill>
+                  <a:latin typeface="Symbol" pitchFamily="2" charset="2"/>
+                </a:rPr>
+                <a:t>f</a:t>
+              </a:r>
+              <a:r>
+                <a:rPr lang="en-US" sz="900" baseline="-25000" dirty="0" err="1">
+                  <a:solidFill>
+                    <a:schemeClr val="accent5"/>
+                  </a:solidFill>
+                  <a:latin typeface="Aptos" panose="020B0004020202020204" pitchFamily="34" charset="0"/>
+                </a:rPr>
+                <a:t>elect</a:t>
+              </a:r>
+              <a:endParaRPr lang="en-US" sz="900" b="1" dirty="0">
+                <a:solidFill>
+                  <a:schemeClr val="accent5"/>
+                </a:solidFill>
+                <a:latin typeface="Symbol" pitchFamily="2" charset="2"/>
+              </a:endParaRPr>
+            </a:p>
+          </p:txBody>
+        </p:sp>
+      </p:grpSp>
+      <p:cxnSp>
+        <p:nvCxnSpPr>
+          <p:cNvPr id="144" name="Straight Arrow Connector 143">
+            <a:extLst>
+              <a:ext uri="{FF2B5EF4-FFF2-40B4-BE49-F238E27FC236}">
+                <a16:creationId xmlns:a16="http://schemas.microsoft.com/office/drawing/2014/main" id="{8F22C655-F351-4E05-89A8-91296B8A12DE}"/>
+              </a:ext>
+            </a:extLst>
+          </p:cNvPr>
+          <p:cNvCxnSpPr>
+            <a:cxnSpLocks/>
+            <a:stCxn id="90" idx="3"/>
+          </p:cNvCxnSpPr>
+          <p:nvPr/>
+        </p:nvCxnSpPr>
+        <p:spPr>
+          <a:xfrm>
+            <a:off x="6797676" y="324661"/>
+            <a:ext cx="386895" cy="0"/>
+          </a:xfrm>
+          <a:prstGeom prst="straightConnector1">
+            <a:avLst/>
+          </a:prstGeom>
+          <a:ln>
+            <a:solidFill>
+              <a:srgbClr val="C00000"/>
+            </a:solidFill>
+            <a:tailEnd type="triangle"/>
+          </a:ln>
+        </p:spPr>
+        <p:style>
+          <a:lnRef idx="2">
+            <a:schemeClr val="accent1"/>
+          </a:lnRef>
+          <a:fillRef idx="0">
+            <a:schemeClr val="accent1"/>
+          </a:fillRef>
+          <a:effectRef idx="1">
+            <a:schemeClr val="accent1"/>
+          </a:effectRef>
+          <a:fontRef idx="minor">
+            <a:schemeClr val="tx1"/>
+          </a:fontRef>
+        </p:style>
+      </p:cxnSp>
+      <p:cxnSp>
+        <p:nvCxnSpPr>
+          <p:cNvPr id="147" name="Straight Arrow Connector 146">
+            <a:extLst>
+              <a:ext uri="{FF2B5EF4-FFF2-40B4-BE49-F238E27FC236}">
+                <a16:creationId xmlns:a16="http://schemas.microsoft.com/office/drawing/2014/main" id="{00DE2484-C997-AD28-8D52-6A143EFD34B8}"/>
+              </a:ext>
+            </a:extLst>
+          </p:cNvPr>
+          <p:cNvCxnSpPr>
+            <a:cxnSpLocks/>
+            <a:stCxn id="122" idx="3"/>
+          </p:cNvCxnSpPr>
+          <p:nvPr/>
+        </p:nvCxnSpPr>
+        <p:spPr>
+          <a:xfrm>
+            <a:off x="6794501" y="1013636"/>
+            <a:ext cx="384628" cy="0"/>
+          </a:xfrm>
+          <a:prstGeom prst="straightConnector1">
+            <a:avLst/>
+          </a:prstGeom>
+          <a:ln>
+            <a:solidFill>
+              <a:srgbClr val="C00000"/>
+            </a:solidFill>
+            <a:tailEnd type="triangle"/>
+          </a:ln>
+        </p:spPr>
+        <p:style>
+          <a:lnRef idx="2">
+            <a:schemeClr val="accent1"/>
+          </a:lnRef>
+          <a:fillRef idx="0">
+            <a:schemeClr val="accent1"/>
+          </a:fillRef>
+          <a:effectRef idx="1">
+            <a:schemeClr val="accent1"/>
+          </a:effectRef>
+          <a:fontRef idx="minor">
+            <a:schemeClr val="tx1"/>
+          </a:fontRef>
+        </p:style>
+      </p:cxnSp>
+      <p:cxnSp>
+        <p:nvCxnSpPr>
+          <p:cNvPr id="158" name="Straight Arrow Connector 157">
+            <a:extLst>
+              <a:ext uri="{FF2B5EF4-FFF2-40B4-BE49-F238E27FC236}">
+                <a16:creationId xmlns:a16="http://schemas.microsoft.com/office/drawing/2014/main" id="{93FF3069-F1E9-4080-DA06-1DADE7A844D7}"/>
+              </a:ext>
+            </a:extLst>
+          </p:cNvPr>
+          <p:cNvCxnSpPr>
+            <a:cxnSpLocks/>
+            <a:stCxn id="127" idx="3"/>
+          </p:cNvCxnSpPr>
+          <p:nvPr/>
+        </p:nvCxnSpPr>
+        <p:spPr>
+          <a:xfrm>
+            <a:off x="6794501" y="1647022"/>
+            <a:ext cx="390070" cy="0"/>
+          </a:xfrm>
+          <a:prstGeom prst="straightConnector1">
+            <a:avLst/>
+          </a:prstGeom>
+          <a:ln>
+            <a:solidFill>
+              <a:srgbClr val="C00000"/>
+            </a:solidFill>
+            <a:tailEnd type="triangle"/>
+          </a:ln>
+        </p:spPr>
+        <p:style>
+          <a:lnRef idx="2">
+            <a:schemeClr val="accent1"/>
+          </a:lnRef>
+          <a:fillRef idx="0">
+            <a:schemeClr val="accent1"/>
+          </a:fillRef>
+          <a:effectRef idx="1">
+            <a:schemeClr val="accent1"/>
+          </a:effectRef>
+          <a:fontRef idx="minor">
+            <a:schemeClr val="tx1"/>
+          </a:fontRef>
+        </p:style>
+      </p:cxnSp>
+      <p:sp>
+        <p:nvSpPr>
+          <p:cNvPr id="170" name="Rounded Rectangle 169">
+            <a:extLst>
+              <a:ext uri="{FF2B5EF4-FFF2-40B4-BE49-F238E27FC236}">
+                <a16:creationId xmlns:a16="http://schemas.microsoft.com/office/drawing/2014/main" id="{ADC62CA8-75F0-4406-8384-EFB0A94DF445}"/>
+              </a:ext>
+            </a:extLst>
+          </p:cNvPr>
+          <p:cNvSpPr/>
+          <p:nvPr/>
+        </p:nvSpPr>
+        <p:spPr>
+          <a:xfrm>
+            <a:off x="7186348" y="38098"/>
+            <a:ext cx="1358937" cy="1975759"/>
+          </a:xfrm>
+          <a:prstGeom prst="roundRect">
+            <a:avLst/>
+          </a:prstGeom>
+          <a:noFill/>
+          <a:ln>
+            <a:solidFill>
+              <a:schemeClr val="tx1"/>
+            </a:solidFill>
+          </a:ln>
+        </p:spPr>
+        <p:style>
+          <a:lnRef idx="2">
+            <a:schemeClr val="accent1">
+              <a:shade val="15000"/>
+            </a:schemeClr>
+          </a:lnRef>
+          <a:fillRef idx="1">
+            <a:schemeClr val="accent1"/>
+          </a:fillRef>
+          <a:effectRef idx="0">
+            <a:schemeClr val="accent1"/>
+          </a:effectRef>
+          <a:fontRef idx="minor">
+            <a:schemeClr val="lt1"/>
+          </a:fontRef>
+        </p:style>
+        <p:txBody>
+          <a:bodyPr rtlCol="0" anchor="ctr"/>
+          <a:lstStyle/>
+          <a:p>
+            <a:pPr algn="ctr"/>
+            <a:r>
+              <a:rPr lang="en-US" sz="1000" b="1" dirty="0" err="1">
+                <a:solidFill>
+                  <a:srgbClr val="C00000"/>
+                </a:solidFill>
+              </a:rPr>
+              <a:t>B</a:t>
+            </a:r>
+            <a:r>
+              <a:rPr lang="en-US" sz="1000" b="1" baseline="-25000" dirty="0" err="1">
+                <a:solidFill>
+                  <a:srgbClr val="C00000"/>
+                </a:solidFill>
+              </a:rPr>
+              <a:t>mass</a:t>
+            </a:r>
+            <a:r>
+              <a:rPr lang="en-US" sz="1000" dirty="0" err="1">
+                <a:solidFill>
+                  <a:schemeClr val="tx1"/>
+                </a:solidFill>
+              </a:rPr>
+              <a:t>+</a:t>
+            </a:r>
+            <a:r>
+              <a:rPr lang="en-US" sz="1000" b="1" dirty="0" err="1">
+                <a:solidFill>
+                  <a:srgbClr val="C00000"/>
+                </a:solidFill>
+              </a:rPr>
+              <a:t>B</a:t>
+            </a:r>
+            <a:r>
+              <a:rPr lang="en-US" sz="1000" b="1" baseline="-25000" dirty="0" err="1">
+                <a:solidFill>
+                  <a:srgbClr val="C00000"/>
+                </a:solidFill>
+              </a:rPr>
+              <a:t>Qloss</a:t>
+            </a:r>
+            <a:r>
+              <a:rPr lang="en-US" sz="1000" b="1" dirty="0" err="1">
+                <a:solidFill>
+                  <a:schemeClr val="tx1"/>
+                </a:solidFill>
+              </a:rPr>
+              <a:t>+</a:t>
+            </a:r>
+            <a:r>
+              <a:rPr lang="en-US" sz="1000" b="1" dirty="0" err="1">
+                <a:solidFill>
+                  <a:srgbClr val="C00000"/>
+                </a:solidFill>
+              </a:rPr>
+              <a:t>B</a:t>
+            </a:r>
+            <a:r>
+              <a:rPr lang="en-US" sz="1000" b="1" baseline="-25000" dirty="0" err="1">
+                <a:solidFill>
+                  <a:srgbClr val="C00000"/>
+                </a:solidFill>
+              </a:rPr>
+              <a:t>elect</a:t>
+            </a:r>
+            <a:endParaRPr lang="en-US" sz="1000" baseline="-25000" dirty="0">
+              <a:solidFill>
+                <a:schemeClr val="accent6"/>
+              </a:solidFill>
+            </a:endParaRPr>
+          </a:p>
+        </p:txBody>
+      </p:sp>
+      <p:cxnSp>
+        <p:nvCxnSpPr>
+          <p:cNvPr id="188" name="Straight Arrow Connector 187">
+            <a:extLst>
+              <a:ext uri="{FF2B5EF4-FFF2-40B4-BE49-F238E27FC236}">
+                <a16:creationId xmlns:a16="http://schemas.microsoft.com/office/drawing/2014/main" id="{CEDF4FD6-3401-DBF6-F076-61C326AC7484}"/>
+              </a:ext>
+            </a:extLst>
+          </p:cNvPr>
+          <p:cNvCxnSpPr>
+            <a:cxnSpLocks/>
+            <a:stCxn id="170" idx="3"/>
+          </p:cNvCxnSpPr>
+          <p:nvPr/>
+        </p:nvCxnSpPr>
+        <p:spPr>
+          <a:xfrm>
+            <a:off x="8545285" y="1025978"/>
+            <a:ext cx="364672" cy="0"/>
+          </a:xfrm>
+          <a:prstGeom prst="straightConnector1">
+            <a:avLst/>
+          </a:prstGeom>
+          <a:ln>
+            <a:solidFill>
+              <a:srgbClr val="C00000"/>
+            </a:solidFill>
+            <a:tailEnd type="triangle"/>
+          </a:ln>
+        </p:spPr>
+        <p:style>
+          <a:lnRef idx="2">
+            <a:schemeClr val="accent1"/>
+          </a:lnRef>
+          <a:fillRef idx="0">
+            <a:schemeClr val="accent1"/>
+          </a:fillRef>
+          <a:effectRef idx="1">
+            <a:schemeClr val="accent1"/>
+          </a:effectRef>
+          <a:fontRef idx="minor">
+            <a:schemeClr val="tx1"/>
+          </a:fontRef>
+        </p:style>
+      </p:cxnSp>
+      <p:sp>
+        <p:nvSpPr>
+          <p:cNvPr id="197" name="TextBox 196">
+            <a:extLst>
+              <a:ext uri="{FF2B5EF4-FFF2-40B4-BE49-F238E27FC236}">
+                <a16:creationId xmlns:a16="http://schemas.microsoft.com/office/drawing/2014/main" id="{1D35B9C1-5368-317B-B025-6F9B1556ED9A}"/>
               </a:ext>
             </a:extLst>
           </p:cNvPr>
@@ -15533,8 +16580,8 @@
         </p:nvSpPr>
         <p:spPr>
           <a:xfrm>
-            <a:off x="5486400" y="152400"/>
-            <a:ext cx="245580" cy="230832"/>
+            <a:off x="8249580" y="45381"/>
+            <a:ext cx="306494" cy="230832"/>
           </a:xfrm>
           <a:prstGeom prst="rect">
             <a:avLst/>
@@ -15549,17 +16596,17 @@
           <a:p>
             <a:r>
               <a:rPr lang="en-US" sz="900" i="1" dirty="0"/>
-              <a:t>6</a:t>
-            </a:r>
-          </a:p>
-        </p:txBody>
-      </p:sp>
-      <p:sp>
-        <p:nvSpPr>
-          <p:cNvPr id="156" name="TextBox 155">
-            <a:extLst>
-              <a:ext uri="{FF2B5EF4-FFF2-40B4-BE49-F238E27FC236}">
-                <a16:creationId xmlns:a16="http://schemas.microsoft.com/office/drawing/2014/main" id="{0B6633B8-496C-6C24-92F8-24CCF80B5795}"/>
+              <a:t>10</a:t>
+            </a:r>
+          </a:p>
+        </p:txBody>
+      </p:sp>
+      <p:sp>
+        <p:nvSpPr>
+          <p:cNvPr id="198" name="TextBox 197">
+            <a:extLst>
+              <a:ext uri="{FF2B5EF4-FFF2-40B4-BE49-F238E27FC236}">
+                <a16:creationId xmlns:a16="http://schemas.microsoft.com/office/drawing/2014/main" id="{D9D5090C-002A-2A15-FBB4-0F2739356BD4}"/>
               </a:ext>
             </a:extLst>
           </p:cNvPr>
@@ -15568,7 +16615,7 @@
         </p:nvSpPr>
         <p:spPr>
           <a:xfrm>
-            <a:off x="6962778" y="623889"/>
+            <a:off x="6600395" y="10886"/>
             <a:ext cx="245580" cy="230832"/>
           </a:xfrm>
           <a:prstGeom prst="rect">
@@ -15585,6 +16632,112 @@
             <a:r>
               <a:rPr lang="en-US" sz="900" i="1" dirty="0"/>
               <a:t>7</a:t>
+            </a:r>
+          </a:p>
+        </p:txBody>
+      </p:sp>
+      <p:sp>
+        <p:nvSpPr>
+          <p:cNvPr id="199" name="TextBox 198">
+            <a:extLst>
+              <a:ext uri="{FF2B5EF4-FFF2-40B4-BE49-F238E27FC236}">
+                <a16:creationId xmlns:a16="http://schemas.microsoft.com/office/drawing/2014/main" id="{A61601C9-478B-25D1-DE06-EFEBA59935AE}"/>
+              </a:ext>
+            </a:extLst>
+          </p:cNvPr>
+          <p:cNvSpPr txBox="1"/>
+          <p:nvPr/>
+        </p:nvSpPr>
+        <p:spPr>
+          <a:xfrm>
+            <a:off x="6600395" y="711177"/>
+            <a:ext cx="245580" cy="230832"/>
+          </a:xfrm>
+          <a:prstGeom prst="rect">
+            <a:avLst/>
+          </a:prstGeom>
+          <a:noFill/>
+        </p:spPr>
+        <p:txBody>
+          <a:bodyPr wrap="none" rtlCol="0">
+            <a:spAutoFit/>
+          </a:bodyPr>
+          <a:lstStyle/>
+          <a:p>
+            <a:r>
+              <a:rPr lang="en-US" sz="900" i="1" dirty="0"/>
+              <a:t>8</a:t>
+            </a:r>
+          </a:p>
+        </p:txBody>
+      </p:sp>
+      <p:sp>
+        <p:nvSpPr>
+          <p:cNvPr id="200" name="TextBox 199">
+            <a:extLst>
+              <a:ext uri="{FF2B5EF4-FFF2-40B4-BE49-F238E27FC236}">
+                <a16:creationId xmlns:a16="http://schemas.microsoft.com/office/drawing/2014/main" id="{BF300C41-8D56-B81F-7FF0-EC04651EC644}"/>
+              </a:ext>
+            </a:extLst>
+          </p:cNvPr>
+          <p:cNvSpPr txBox="1"/>
+          <p:nvPr/>
+        </p:nvSpPr>
+        <p:spPr>
+          <a:xfrm>
+            <a:off x="6594952" y="1349828"/>
+            <a:ext cx="245580" cy="230832"/>
+          </a:xfrm>
+          <a:prstGeom prst="rect">
+            <a:avLst/>
+          </a:prstGeom>
+          <a:noFill/>
+        </p:spPr>
+        <p:txBody>
+          <a:bodyPr wrap="none" rtlCol="0">
+            <a:spAutoFit/>
+          </a:bodyPr>
+          <a:lstStyle/>
+          <a:p>
+            <a:r>
+              <a:rPr lang="en-US" sz="900" i="1" dirty="0"/>
+              <a:t>9</a:t>
+            </a:r>
+          </a:p>
+        </p:txBody>
+      </p:sp>
+      <p:sp>
+        <p:nvSpPr>
+          <p:cNvPr id="202" name="TextBox 201">
+            <a:extLst>
+              <a:ext uri="{FF2B5EF4-FFF2-40B4-BE49-F238E27FC236}">
+                <a16:creationId xmlns:a16="http://schemas.microsoft.com/office/drawing/2014/main" id="{A656FE70-4377-2F54-142F-8E54993D1BBA}"/>
+              </a:ext>
+            </a:extLst>
+          </p:cNvPr>
+          <p:cNvSpPr txBox="1"/>
+          <p:nvPr/>
+        </p:nvSpPr>
+        <p:spPr>
+          <a:xfrm>
+            <a:off x="8243868" y="1167364"/>
+            <a:ext cx="932810" cy="230832"/>
+          </a:xfrm>
+          <a:prstGeom prst="rect">
+            <a:avLst/>
+          </a:prstGeom>
+          <a:noFill/>
+        </p:spPr>
+        <p:txBody>
+          <a:bodyPr wrap="square">
+            <a:spAutoFit/>
+          </a:bodyPr>
+          <a:lstStyle/>
+          <a:p>
+            <a:pPr algn="ctr"/>
+            <a:r>
+              <a:rPr lang="en-US" sz="900" dirty="0"/>
+              <a:t> losses</a:t>
             </a:r>
           </a:p>
         </p:txBody>
